--- a/exports/pptx/lessons/senior-module-08-yoga/day-02-eight-limbs.pptx
+++ b/exports/pptx/lessons/senior-module-08-yoga/day-02-eight-limbs.pptx
@@ -16,9 +16,14 @@
     <p:sldId id="264" r:id="rId10"/>
     <p:sldId id="265" r:id="rId11"/>
     <p:sldId id="266" r:id="rId12"/>
+    <p:sldId id="267" r:id="rId13"/>
+    <p:sldId id="268" r:id="rId14"/>
+    <p:sldId id="269" r:id="rId15"/>
+    <p:sldId id="270" r:id="rId16"/>
+    <p:sldId id="271" r:id="rId17"/>
   </p:sldIdLst>
   <p:notesMasterIdLst>
-    <p:notesMasterId r:id="rId13"/>
+    <p:notesMasterId r:id="rId18"/>
   </p:notesMasterIdLst>
   <p:sldSz cx="9144000" cy="5143500"/>
   <p:notesSz cx="5143500" cy="9144000"/>
@@ -712,6 +717,446 @@
             <a:fld id="{F7021451-1387-4CA6-816F-3879F97B5CBC}" type="slidenum">
               <a:rPr lang="en-US"/>
               <a:t>11</a:t>
+            </a:fld>
+            <a:endParaRPr lang="en-US"/>
+          </a:p>
+        </p:txBody>
+      </p:sp>
+    </p:spTree>
+    <p:extLst>
+      <p:ext uri="{BB962C8B-B14F-4D97-AF65-F5344CB8AC3E}">
+        <p14:creationId xmlns:p14="http://schemas.microsoft.com/office/powerpoint/2010/main" val="1024086991"/>
+      </p:ext>
+    </p:extLst>
+  </p:cSld>
+  <p:clrMapOvr>
+    <a:masterClrMapping/>
+  </p:clrMapOvr>
+</p:notes>
+</file>
+
+<file path=ppt/notesSlides/notesSlide12.xml><?xml version="1.0" encoding="utf-8"?>
+<p:notes xmlns:a="http://schemas.openxmlformats.org/drawingml/2006/main" xmlns:r="http://schemas.openxmlformats.org/officeDocument/2006/relationships" xmlns:p="http://schemas.openxmlformats.org/presentationml/2006/main">
+  <p:cSld>
+    <p:spTree>
+      <p:nvGrpSpPr>
+        <p:cNvPr id="1" name=""/>
+        <p:cNvGrpSpPr/>
+        <p:nvPr/>
+      </p:nvGrpSpPr>
+      <p:grpSpPr>
+        <a:xfrm>
+          <a:off x="0" y="0"/>
+          <a:ext cx="0" cy="0"/>
+          <a:chOff x="0" y="0"/>
+          <a:chExt cx="0" cy="0"/>
+        </a:xfrm>
+      </p:grpSpPr>
+      <p:sp>
+        <p:nvSpPr>
+          <p:cNvPr id="2" name="Slide Image Placeholder 1"/>
+          <p:cNvSpPr>
+            <a:spLocks noGrp="1" noRot="1" noChangeAspect="1"/>
+          </p:cNvSpPr>
+          <p:nvPr>
+            <p:ph type="sldImg"/>
+          </p:nvPr>
+        </p:nvSpPr>
+        <p:spPr/>
+      </p:sp>
+      <p:sp>
+        <p:nvSpPr>
+          <p:cNvPr id="3" name="Notes Placeholder 2"/>
+          <p:cNvSpPr>
+            <a:spLocks noGrp="1"/>
+          </p:cNvSpPr>
+          <p:nvPr>
+            <p:ph type="body" idx="1"/>
+          </p:nvPr>
+        </p:nvSpPr>
+        <p:spPr/>
+        <p:txBody>
+          <a:bodyPr/>
+          <a:lstStyle/>
+          <a:p>
+            <a:r>
+              <a:rPr lang="en-US" dirty="0"/>
+              <a:t/>
+            </a:r>
+            <a:endParaRPr lang="en-US" dirty="0"/>
+          </a:p>
+        </p:txBody>
+      </p:sp>
+      <p:sp>
+        <p:nvSpPr>
+          <p:cNvPr id="4" name="Slide Number Placeholder 3"/>
+          <p:cNvSpPr>
+            <a:spLocks noGrp="1"/>
+          </p:cNvSpPr>
+          <p:nvPr>
+            <p:ph type="sldNum" sz="quarter" idx="10"/>
+          </p:nvPr>
+        </p:nvSpPr>
+        <p:spPr/>
+        <p:txBody>
+          <a:bodyPr/>
+          <a:lstStyle/>
+          <a:p>
+            <a:fld id="{F7021451-1387-4CA6-816F-3879F97B5CBC}" type="slidenum">
+              <a:rPr lang="en-US"/>
+              <a:t>12</a:t>
+            </a:fld>
+            <a:endParaRPr lang="en-US"/>
+          </a:p>
+        </p:txBody>
+      </p:sp>
+    </p:spTree>
+    <p:extLst>
+      <p:ext uri="{BB962C8B-B14F-4D97-AF65-F5344CB8AC3E}">
+        <p14:creationId xmlns:p14="http://schemas.microsoft.com/office/powerpoint/2010/main" val="1024086991"/>
+      </p:ext>
+    </p:extLst>
+  </p:cSld>
+  <p:clrMapOvr>
+    <a:masterClrMapping/>
+  </p:clrMapOvr>
+</p:notes>
+</file>
+
+<file path=ppt/notesSlides/notesSlide13.xml><?xml version="1.0" encoding="utf-8"?>
+<p:notes xmlns:a="http://schemas.openxmlformats.org/drawingml/2006/main" xmlns:r="http://schemas.openxmlformats.org/officeDocument/2006/relationships" xmlns:p="http://schemas.openxmlformats.org/presentationml/2006/main">
+  <p:cSld>
+    <p:spTree>
+      <p:nvGrpSpPr>
+        <p:cNvPr id="1" name=""/>
+        <p:cNvGrpSpPr/>
+        <p:nvPr/>
+      </p:nvGrpSpPr>
+      <p:grpSpPr>
+        <a:xfrm>
+          <a:off x="0" y="0"/>
+          <a:ext cx="0" cy="0"/>
+          <a:chOff x="0" y="0"/>
+          <a:chExt cx="0" cy="0"/>
+        </a:xfrm>
+      </p:grpSpPr>
+      <p:sp>
+        <p:nvSpPr>
+          <p:cNvPr id="2" name="Slide Image Placeholder 1"/>
+          <p:cNvSpPr>
+            <a:spLocks noGrp="1" noRot="1" noChangeAspect="1"/>
+          </p:cNvSpPr>
+          <p:nvPr>
+            <p:ph type="sldImg"/>
+          </p:nvPr>
+        </p:nvSpPr>
+        <p:spPr/>
+      </p:sp>
+      <p:sp>
+        <p:nvSpPr>
+          <p:cNvPr id="3" name="Notes Placeholder 2"/>
+          <p:cNvSpPr>
+            <a:spLocks noGrp="1"/>
+          </p:cNvSpPr>
+          <p:nvPr>
+            <p:ph type="body" idx="1"/>
+          </p:nvPr>
+        </p:nvSpPr>
+        <p:spPr/>
+        <p:txBody>
+          <a:bodyPr/>
+          <a:lstStyle/>
+          <a:p>
+            <a:r>
+              <a:rPr lang="en-US" dirty="0"/>
+              <a:t/>
+            </a:r>
+            <a:endParaRPr lang="en-US" dirty="0"/>
+          </a:p>
+        </p:txBody>
+      </p:sp>
+      <p:sp>
+        <p:nvSpPr>
+          <p:cNvPr id="4" name="Slide Number Placeholder 3"/>
+          <p:cNvSpPr>
+            <a:spLocks noGrp="1"/>
+          </p:cNvSpPr>
+          <p:nvPr>
+            <p:ph type="sldNum" sz="quarter" idx="10"/>
+          </p:nvPr>
+        </p:nvSpPr>
+        <p:spPr/>
+        <p:txBody>
+          <a:bodyPr/>
+          <a:lstStyle/>
+          <a:p>
+            <a:fld id="{F7021451-1387-4CA6-816F-3879F97B5CBC}" type="slidenum">
+              <a:rPr lang="en-US"/>
+              <a:t>13</a:t>
+            </a:fld>
+            <a:endParaRPr lang="en-US"/>
+          </a:p>
+        </p:txBody>
+      </p:sp>
+    </p:spTree>
+    <p:extLst>
+      <p:ext uri="{BB962C8B-B14F-4D97-AF65-F5344CB8AC3E}">
+        <p14:creationId xmlns:p14="http://schemas.microsoft.com/office/powerpoint/2010/main" val="1024086991"/>
+      </p:ext>
+    </p:extLst>
+  </p:cSld>
+  <p:clrMapOvr>
+    <a:masterClrMapping/>
+  </p:clrMapOvr>
+</p:notes>
+</file>
+
+<file path=ppt/notesSlides/notesSlide14.xml><?xml version="1.0" encoding="utf-8"?>
+<p:notes xmlns:a="http://schemas.openxmlformats.org/drawingml/2006/main" xmlns:r="http://schemas.openxmlformats.org/officeDocument/2006/relationships" xmlns:p="http://schemas.openxmlformats.org/presentationml/2006/main">
+  <p:cSld>
+    <p:spTree>
+      <p:nvGrpSpPr>
+        <p:cNvPr id="1" name=""/>
+        <p:cNvGrpSpPr/>
+        <p:nvPr/>
+      </p:nvGrpSpPr>
+      <p:grpSpPr>
+        <a:xfrm>
+          <a:off x="0" y="0"/>
+          <a:ext cx="0" cy="0"/>
+          <a:chOff x="0" y="0"/>
+          <a:chExt cx="0" cy="0"/>
+        </a:xfrm>
+      </p:grpSpPr>
+      <p:sp>
+        <p:nvSpPr>
+          <p:cNvPr id="2" name="Slide Image Placeholder 1"/>
+          <p:cNvSpPr>
+            <a:spLocks noGrp="1" noRot="1" noChangeAspect="1"/>
+          </p:cNvSpPr>
+          <p:nvPr>
+            <p:ph type="sldImg"/>
+          </p:nvPr>
+        </p:nvSpPr>
+        <p:spPr/>
+      </p:sp>
+      <p:sp>
+        <p:nvSpPr>
+          <p:cNvPr id="3" name="Notes Placeholder 2"/>
+          <p:cNvSpPr>
+            <a:spLocks noGrp="1"/>
+          </p:cNvSpPr>
+          <p:nvPr>
+            <p:ph type="body" idx="1"/>
+          </p:nvPr>
+        </p:nvSpPr>
+        <p:spPr/>
+        <p:txBody>
+          <a:bodyPr/>
+          <a:lstStyle/>
+          <a:p>
+            <a:r>
+              <a:rPr lang="en-US" dirty="0"/>
+              <a:t/>
+            </a:r>
+            <a:endParaRPr lang="en-US" dirty="0"/>
+          </a:p>
+        </p:txBody>
+      </p:sp>
+      <p:sp>
+        <p:nvSpPr>
+          <p:cNvPr id="4" name="Slide Number Placeholder 3"/>
+          <p:cNvSpPr>
+            <a:spLocks noGrp="1"/>
+          </p:cNvSpPr>
+          <p:nvPr>
+            <p:ph type="sldNum" sz="quarter" idx="10"/>
+          </p:nvPr>
+        </p:nvSpPr>
+        <p:spPr/>
+        <p:txBody>
+          <a:bodyPr/>
+          <a:lstStyle/>
+          <a:p>
+            <a:fld id="{F7021451-1387-4CA6-816F-3879F97B5CBC}" type="slidenum">
+              <a:rPr lang="en-US"/>
+              <a:t>14</a:t>
+            </a:fld>
+            <a:endParaRPr lang="en-US"/>
+          </a:p>
+        </p:txBody>
+      </p:sp>
+    </p:spTree>
+    <p:extLst>
+      <p:ext uri="{BB962C8B-B14F-4D97-AF65-F5344CB8AC3E}">
+        <p14:creationId xmlns:p14="http://schemas.microsoft.com/office/powerpoint/2010/main" val="1024086991"/>
+      </p:ext>
+    </p:extLst>
+  </p:cSld>
+  <p:clrMapOvr>
+    <a:masterClrMapping/>
+  </p:clrMapOvr>
+</p:notes>
+</file>
+
+<file path=ppt/notesSlides/notesSlide15.xml><?xml version="1.0" encoding="utf-8"?>
+<p:notes xmlns:a="http://schemas.openxmlformats.org/drawingml/2006/main" xmlns:r="http://schemas.openxmlformats.org/officeDocument/2006/relationships" xmlns:p="http://schemas.openxmlformats.org/presentationml/2006/main">
+  <p:cSld>
+    <p:spTree>
+      <p:nvGrpSpPr>
+        <p:cNvPr id="1" name=""/>
+        <p:cNvGrpSpPr/>
+        <p:nvPr/>
+      </p:nvGrpSpPr>
+      <p:grpSpPr>
+        <a:xfrm>
+          <a:off x="0" y="0"/>
+          <a:ext cx="0" cy="0"/>
+          <a:chOff x="0" y="0"/>
+          <a:chExt cx="0" cy="0"/>
+        </a:xfrm>
+      </p:grpSpPr>
+      <p:sp>
+        <p:nvSpPr>
+          <p:cNvPr id="2" name="Slide Image Placeholder 1"/>
+          <p:cNvSpPr>
+            <a:spLocks noGrp="1" noRot="1" noChangeAspect="1"/>
+          </p:cNvSpPr>
+          <p:nvPr>
+            <p:ph type="sldImg"/>
+          </p:nvPr>
+        </p:nvSpPr>
+        <p:spPr/>
+      </p:sp>
+      <p:sp>
+        <p:nvSpPr>
+          <p:cNvPr id="3" name="Notes Placeholder 2"/>
+          <p:cNvSpPr>
+            <a:spLocks noGrp="1"/>
+          </p:cNvSpPr>
+          <p:nvPr>
+            <p:ph type="body" idx="1"/>
+          </p:nvPr>
+        </p:nvSpPr>
+        <p:spPr/>
+        <p:txBody>
+          <a:bodyPr/>
+          <a:lstStyle/>
+          <a:p>
+            <a:r>
+              <a:rPr lang="en-US" dirty="0"/>
+              <a:t/>
+            </a:r>
+            <a:endParaRPr lang="en-US" dirty="0"/>
+          </a:p>
+        </p:txBody>
+      </p:sp>
+      <p:sp>
+        <p:nvSpPr>
+          <p:cNvPr id="4" name="Slide Number Placeholder 3"/>
+          <p:cNvSpPr>
+            <a:spLocks noGrp="1"/>
+          </p:cNvSpPr>
+          <p:nvPr>
+            <p:ph type="sldNum" sz="quarter" idx="10"/>
+          </p:nvPr>
+        </p:nvSpPr>
+        <p:spPr/>
+        <p:txBody>
+          <a:bodyPr/>
+          <a:lstStyle/>
+          <a:p>
+            <a:fld id="{F7021451-1387-4CA6-816F-3879F97B5CBC}" type="slidenum">
+              <a:rPr lang="en-US"/>
+              <a:t>15</a:t>
+            </a:fld>
+            <a:endParaRPr lang="en-US"/>
+          </a:p>
+        </p:txBody>
+      </p:sp>
+    </p:spTree>
+    <p:extLst>
+      <p:ext uri="{BB962C8B-B14F-4D97-AF65-F5344CB8AC3E}">
+        <p14:creationId xmlns:p14="http://schemas.microsoft.com/office/powerpoint/2010/main" val="1024086991"/>
+      </p:ext>
+    </p:extLst>
+  </p:cSld>
+  <p:clrMapOvr>
+    <a:masterClrMapping/>
+  </p:clrMapOvr>
+</p:notes>
+</file>
+
+<file path=ppt/notesSlides/notesSlide16.xml><?xml version="1.0" encoding="utf-8"?>
+<p:notes xmlns:a="http://schemas.openxmlformats.org/drawingml/2006/main" xmlns:r="http://schemas.openxmlformats.org/officeDocument/2006/relationships" xmlns:p="http://schemas.openxmlformats.org/presentationml/2006/main">
+  <p:cSld>
+    <p:spTree>
+      <p:nvGrpSpPr>
+        <p:cNvPr id="1" name=""/>
+        <p:cNvGrpSpPr/>
+        <p:nvPr/>
+      </p:nvGrpSpPr>
+      <p:grpSpPr>
+        <a:xfrm>
+          <a:off x="0" y="0"/>
+          <a:ext cx="0" cy="0"/>
+          <a:chOff x="0" y="0"/>
+          <a:chExt cx="0" cy="0"/>
+        </a:xfrm>
+      </p:grpSpPr>
+      <p:sp>
+        <p:nvSpPr>
+          <p:cNvPr id="2" name="Slide Image Placeholder 1"/>
+          <p:cNvSpPr>
+            <a:spLocks noGrp="1" noRot="1" noChangeAspect="1"/>
+          </p:cNvSpPr>
+          <p:nvPr>
+            <p:ph type="sldImg"/>
+          </p:nvPr>
+        </p:nvSpPr>
+        <p:spPr/>
+      </p:sp>
+      <p:sp>
+        <p:nvSpPr>
+          <p:cNvPr id="3" name="Notes Placeholder 2"/>
+          <p:cNvSpPr>
+            <a:spLocks noGrp="1"/>
+          </p:cNvSpPr>
+          <p:nvPr>
+            <p:ph type="body" idx="1"/>
+          </p:nvPr>
+        </p:nvSpPr>
+        <p:spPr/>
+        <p:txBody>
+          <a:bodyPr/>
+          <a:lstStyle/>
+          <a:p>
+            <a:r>
+              <a:rPr lang="en-US" dirty="0"/>
+              <a:t/>
+            </a:r>
+            <a:endParaRPr lang="en-US" dirty="0"/>
+          </a:p>
+        </p:txBody>
+      </p:sp>
+      <p:sp>
+        <p:nvSpPr>
+          <p:cNvPr id="4" name="Slide Number Placeholder 3"/>
+          <p:cNvSpPr>
+            <a:spLocks noGrp="1"/>
+          </p:cNvSpPr>
+          <p:nvPr>
+            <p:ph type="sldNum" sz="quarter" idx="10"/>
+          </p:nvPr>
+        </p:nvSpPr>
+        <p:spPr/>
+        <p:txBody>
+          <a:bodyPr/>
+          <a:lstStyle/>
+          <a:p>
+            <a:fld id="{F7021451-1387-4CA6-816F-3879F97B5CBC}" type="slidenum">
+              <a:rPr lang="en-US"/>
+              <a:t>16</a:t>
             </a:fld>
             <a:endParaRPr lang="en-US"/>
           </a:p>
@@ -1965,102 +2410,6 @@
         </p:nvSpPr>
         <p:spPr>
           <a:xfrm>
-            <a:off x="406301" y="1223963"/>
-            <a:ext cx="8498026" cy="274290"/>
-          </a:xfrm>
-          <a:prstGeom prst="rect">
-            <a:avLst/>
-          </a:prstGeom>
-          <a:noFill/>
-          <a:ln/>
-        </p:spPr>
-        <p:txBody>
-          <a:bodyPr wrap="square" lIns="0" tIns="0" rIns="0" bIns="0" rtlCol="0" anchor="t"/>
-          <a:lstStyle/>
-          <a:p>
-            <a:pPr algn="l" indent="0" marL="0">
-              <a:lnSpc>
-                <a:spcPts val="2160"/>
-              </a:lnSpc>
-              <a:spcBef>
-                <a:spcPts val="600"/>
-              </a:spcBef>
-              <a:spcAft>
-                <a:spcPts val="800"/>
-              </a:spcAft>
-              <a:buNone/>
-            </a:pPr>
-            <a:r>
-              <a:rPr lang="en-US" sz="1800" b="1" dirty="0">
-                <a:solidFill>
-                  <a:srgbClr val="997929"/>
-                </a:solidFill>
-                <a:latin typeface="Times New Roman" pitchFamily="34" charset="0"/>
-                <a:ea typeface="Times New Roman" pitchFamily="34" charset="-122"/>
-                <a:cs typeface="Times New Roman" pitchFamily="34" charset="-120"/>
-              </a:rPr>
-              <a:t>Learning objective</a:t>
-            </a:r>
-            <a:endParaRPr lang="en-US" sz="1800" dirty="0"/>
-          </a:p>
-        </p:txBody>
-      </p:sp>
-      <p:sp>
-        <p:nvSpPr>
-          <p:cNvPr id="6" name="Text 4"/>
-          <p:cNvSpPr/>
-          <p:nvPr/>
-        </p:nvSpPr>
-        <p:spPr>
-          <a:xfrm>
-            <a:off x="406301" y="1637854"/>
-            <a:ext cx="8498026" cy="426541"/>
-          </a:xfrm>
-          <a:prstGeom prst="rect">
-            <a:avLst/>
-          </a:prstGeom>
-          <a:noFill/>
-          <a:ln/>
-        </p:spPr>
-        <p:txBody>
-          <a:bodyPr wrap="square" lIns="0" tIns="0" rIns="0" bIns="0" rtlCol="0" anchor="t"/>
-          <a:lstStyle/>
-          <a:p>
-            <a:pPr algn="l" indent="0" marL="0">
-              <a:lnSpc>
-                <a:spcPts val="1680"/>
-              </a:lnSpc>
-              <a:spcBef>
-                <a:spcPts val="300"/>
-              </a:spcBef>
-              <a:spcAft>
-                <a:spcPts val="300"/>
-              </a:spcAft>
-              <a:buNone/>
-            </a:pPr>
-            <a:r>
-              <a:rPr lang="en-US" sz="1200" dirty="0">
-                <a:solidFill>
-                  <a:srgbClr val="1A1A1A"/>
-                </a:solidFill>
-                <a:latin typeface="Georgia" pitchFamily="34" charset="0"/>
-                <a:ea typeface="Georgia" pitchFamily="34" charset="-122"/>
-                <a:cs typeface="Georgia" pitchFamily="34" charset="-120"/>
-              </a:rPr>
-              <a:t>Students enumerate the eight limbs with Patañjali's classical definitions and locate the limbs within the Sāṅkhya-Yoga framework.</a:t>
-            </a:r>
-            <a:endParaRPr lang="en-US" sz="1200" dirty="0"/>
-          </a:p>
-        </p:txBody>
-      </p:sp>
-      <p:sp>
-        <p:nvSpPr>
-          <p:cNvPr id="7" name="Text 5"/>
-          <p:cNvSpPr/>
-          <p:nvPr/>
-        </p:nvSpPr>
-        <p:spPr>
-          <a:xfrm>
             <a:off x="406301" y="4434929"/>
             <a:ext cx="8498026" cy="213271"/>
           </a:xfrm>
@@ -2205,7 +2554,7 @@
                 <a:ea typeface="Times New Roman" pitchFamily="34" charset="-122"/>
                 <a:cs typeface="Times New Roman" pitchFamily="34" charset="-120"/>
               </a:rPr>
-              <a:t>Teacher notes</a:t>
+              <a:t>Core (20 min) (cont.)</a:t>
             </a:r>
             <a:endParaRPr lang="en-US" sz="1800" dirty="0"/>
           </a:p>
@@ -2220,7 +2569,7 @@
         <p:spPr>
           <a:xfrm>
             <a:off x="406301" y="870942"/>
-            <a:ext cx="8498026" cy="426541"/>
+            <a:ext cx="8498026" cy="213271"/>
           </a:xfrm>
           <a:prstGeom prst="rect">
             <a:avLst/>
@@ -2245,15 +2594,15 @@
               <a:buNone/>
             </a:pPr>
             <a:r>
-              <a:rPr lang="en-US" sz="1200" dirty="0">
-                <a:solidFill>
-                  <a:srgbClr val="1A1A1A"/>
-                </a:solidFill>
-                <a:latin typeface="Georgia" pitchFamily="34" charset="0"/>
-                <a:ea typeface="Georgia" pitchFamily="34" charset="-122"/>
-                <a:cs typeface="Georgia" pitchFamily="34" charset="-120"/>
-              </a:rPr>
-              <a:t>– The "proportions" observation is a powerful teaching moment. Most students assume yoga = āsana. The 3-out-of-196 statistic reframes this.</a:t>
+              <a:rPr lang="en-US" sz="1200" b="1" dirty="0">
+                <a:solidFill>
+                  <a:srgbClr val="1A1A1A"/>
+                </a:solidFill>
+                <a:latin typeface="Georgia" pitchFamily="34" charset="0"/>
+                <a:ea typeface="Georgia" pitchFamily="34" charset="-122"/>
+                <a:cs typeface="Georgia" pitchFamily="34" charset="-120"/>
+              </a:rPr>
+              <a:t>Modern postural yoga focuses on āsana — to which Patañjali devotes 3 sūtras out of 196.</a:t>
             </a:r>
             <a:endParaRPr lang="en-US" sz="1200" dirty="0"/>
           </a:p>
@@ -2411,7 +2760,7 @@
                 <a:ea typeface="Times New Roman" pitchFamily="34" charset="-122"/>
                 <a:cs typeface="Times New Roman" pitchFamily="34" charset="-120"/>
               </a:rPr>
-              <a:t>Citation(s) used</a:t>
+              <a:t>Practice (12 min)</a:t>
             </a:r>
             <a:endParaRPr lang="en-US" sz="1800" dirty="0"/>
           </a:p>
@@ -2425,8 +2774,8 @@
         </p:nvSpPr>
         <p:spPr>
           <a:xfrm>
-            <a:off x="406301" y="870942"/>
-            <a:ext cx="8498026" cy="213271"/>
+            <a:off x="634901" y="883593"/>
+            <a:ext cx="8102798" cy="281880"/>
           </a:xfrm>
           <a:prstGeom prst="rect">
             <a:avLst/>
@@ -2438,17 +2787,15 @@
           <a:bodyPr wrap="square" lIns="0" tIns="0" rIns="0" bIns="0" rtlCol="0" anchor="t"/>
           <a:lstStyle/>
           <a:p>
-            <a:pPr algn="l" indent="0" marL="0">
-              <a:lnSpc>
-                <a:spcPts val="1680"/>
-              </a:lnSpc>
-              <a:spcBef>
-                <a:spcPts val="300"/>
-              </a:spcBef>
-              <a:spcAft>
-                <a:spcPts val="300"/>
-              </a:spcAft>
-              <a:buNone/>
+            <a:pPr algn="l" marL="342900" indent="-342900">
+              <a:lnSpc>
+                <a:spcPts val="1620"/>
+              </a:lnSpc>
+              <a:spcAft>
+                <a:spcPts val="300"/>
+              </a:spcAft>
+              <a:buSzPct val="100000"/>
+              <a:buChar char="•"/>
             </a:pPr>
             <a:r>
               <a:rPr lang="en-US" sz="1200" dirty="0">
@@ -2459,7 +2806,7 @@
                 <a:ea typeface="Georgia" pitchFamily="34" charset="-122"/>
                 <a:cs typeface="Georgia" pitchFamily="34" charset="-120"/>
               </a:rPr>
-              <a:t>– Patañjali YS 2.29, 2.30, 2.32, 2.46, 2.49 — Bryant (2009).</a:t>
+              <a:t>Tāḍāsana → vṛkṣāsana → baddha-koṇāsana → balāsana → sukhāsana.</a:t>
             </a:r>
             <a:endParaRPr lang="en-US" sz="1200" dirty="0"/>
           </a:p>
@@ -2473,8 +2820,8 @@
         </p:nvSpPr>
         <p:spPr>
           <a:xfrm>
-            <a:off x="634901" y="1173063"/>
-            <a:ext cx="8102798" cy="300930"/>
+            <a:off x="406301" y="4434929"/>
+            <a:ext cx="8498026" cy="213271"/>
           </a:xfrm>
           <a:prstGeom prst="rect">
             <a:avLst/>
@@ -2486,6 +2833,164 @@
           <a:bodyPr wrap="square" lIns="0" tIns="0" rIns="0" bIns="0" rtlCol="0" anchor="t"/>
           <a:lstStyle/>
           <a:p>
+            <a:pPr algn="l" indent="0" marL="0">
+              <a:lnSpc>
+                <a:spcPts val="1680"/>
+              </a:lnSpc>
+              <a:spcBef>
+                <a:spcPts val="300"/>
+              </a:spcBef>
+              <a:spcAft>
+                <a:spcPts val="300"/>
+              </a:spcAft>
+              <a:buNone/>
+            </a:pPr>
+            <a:r>
+              <a:rPr lang="en-US" sz="1200" dirty="0">
+                <a:solidFill>
+                  <a:srgbClr val="1A1A1A"/>
+                </a:solidFill>
+                <a:latin typeface="Georgia" pitchFamily="34" charset="0"/>
+                <a:ea typeface="Georgia" pitchFamily="34" charset="-122"/>
+                <a:cs typeface="Georgia" pitchFamily="34" charset="-120"/>
+              </a:rPr>
+              <a:t>Senior ·  · IKS Curriculum</a:t>
+            </a:r>
+            <a:endParaRPr lang="en-US" sz="1200" dirty="0"/>
+          </a:p>
+        </p:txBody>
+      </p:sp>
+    </p:spTree>
+  </p:cSld>
+  <p:clrMapOvr>
+    <a:masterClrMapping/>
+  </p:clrMapOvr>
+</p:sld>
+</file>
+
+<file path=ppt/slides/slide12.xml><?xml version="1.0" encoding="utf-8"?>
+<p:sld xmlns:a="http://schemas.openxmlformats.org/drawingml/2006/main" xmlns:r="http://schemas.openxmlformats.org/officeDocument/2006/relationships" xmlns:p="http://schemas.openxmlformats.org/presentationml/2006/main">
+  <p:cSld name="Slide 12">
+    <p:bg>
+      <p:bgPr>
+        <a:solidFill>
+          <a:srgbClr val="FAF7F2"/>
+        </a:solidFill>
+      </p:bgPr>
+    </p:bg>
+    <p:spTree>
+      <p:nvGrpSpPr>
+        <p:cNvPr id="1" name=""/>
+        <p:cNvGrpSpPr/>
+        <p:nvPr/>
+      </p:nvGrpSpPr>
+      <p:grpSpPr>
+        <a:xfrm>
+          <a:off x="0" y="0"/>
+          <a:ext cx="0" cy="0"/>
+          <a:chOff x="0" y="0"/>
+          <a:chExt cx="0" cy="0"/>
+        </a:xfrm>
+      </p:grpSpPr>
+      <p:sp>
+        <p:nvSpPr>
+          <p:cNvPr id="2" name="Text 0"/>
+          <p:cNvSpPr/>
+          <p:nvPr/>
+        </p:nvSpPr>
+        <p:spPr>
+          <a:xfrm>
+            <a:off x="0" y="0"/>
+            <a:ext cx="9144000" cy="101501"/>
+          </a:xfrm>
+          <a:prstGeom prst="rect">
+            <a:avLst/>
+          </a:prstGeom>
+          <a:solidFill>
+            <a:srgbClr val="5D1D2E"/>
+          </a:solidFill>
+          <a:ln/>
+        </p:spPr>
+        <p:txBody>
+          <a:bodyPr wrap="square" rtlCol="0" anchor="ctr"/>
+          <a:lstStyle/>
+          <a:p>
+            <a:pPr indent="0" marL="0">
+              <a:buNone/>
+            </a:pPr>
+            <a:endParaRPr lang="en-US" dirty="0"/>
+          </a:p>
+        </p:txBody>
+      </p:sp>
+      <p:sp>
+        <p:nvSpPr>
+          <p:cNvPr id="3" name="Text 1"/>
+          <p:cNvSpPr/>
+          <p:nvPr/>
+        </p:nvSpPr>
+        <p:spPr>
+          <a:xfrm>
+            <a:off x="406301" y="457051"/>
+            <a:ext cx="8498026" cy="274290"/>
+          </a:xfrm>
+          <a:prstGeom prst="rect">
+            <a:avLst/>
+          </a:prstGeom>
+          <a:noFill/>
+          <a:ln/>
+        </p:spPr>
+        <p:txBody>
+          <a:bodyPr wrap="square" lIns="0" tIns="0" rIns="0" bIns="0" rtlCol="0" anchor="t"/>
+          <a:lstStyle/>
+          <a:p>
+            <a:pPr algn="l" indent="0" marL="0">
+              <a:lnSpc>
+                <a:spcPts val="2160"/>
+              </a:lnSpc>
+              <a:spcBef>
+                <a:spcPts val="600"/>
+              </a:spcBef>
+              <a:spcAft>
+                <a:spcPts val="800"/>
+              </a:spcAft>
+              <a:buNone/>
+            </a:pPr>
+            <a:r>
+              <a:rPr lang="en-US" sz="1800" b="1" dirty="0">
+                <a:solidFill>
+                  <a:srgbClr val="997929"/>
+                </a:solidFill>
+                <a:latin typeface="Times New Roman" pitchFamily="34" charset="0"/>
+                <a:ea typeface="Times New Roman" pitchFamily="34" charset="-122"/>
+                <a:cs typeface="Times New Roman" pitchFamily="34" charset="-120"/>
+              </a:rPr>
+              <a:t>Limb quiz (5 min)</a:t>
+            </a:r>
+            <a:endParaRPr lang="en-US" sz="1800" dirty="0"/>
+          </a:p>
+        </p:txBody>
+      </p:sp>
+      <p:sp>
+        <p:nvSpPr>
+          <p:cNvPr id="4" name="Text 2"/>
+          <p:cNvSpPr/>
+          <p:nvPr/>
+        </p:nvSpPr>
+        <p:spPr>
+          <a:xfrm>
+            <a:off x="634901" y="883593"/>
+            <a:ext cx="8102798" cy="281880"/>
+          </a:xfrm>
+          <a:prstGeom prst="rect">
+            <a:avLst/>
+          </a:prstGeom>
+          <a:noFill/>
+          <a:ln/>
+        </p:spPr>
+        <p:txBody>
+          <a:bodyPr wrap="square" lIns="0" tIns="0" rIns="0" bIns="0" rtlCol="0" anchor="t"/>
+          <a:lstStyle/>
+          <a:p>
             <a:pPr algn="l" marL="342900" indent="-342900">
               <a:lnSpc>
                 <a:spcPts val="1620"/>
@@ -2505,6 +3010,1010 @@
                 <a:ea typeface="Georgia" pitchFamily="34" charset="-122"/>
                 <a:cs typeface="Georgia" pitchFamily="34" charset="-120"/>
               </a:rPr>
+              <a:t>8 marks — name all 8 limbs in Sanskrit with English meaning.</a:t>
+            </a:r>
+            <a:endParaRPr lang="en-US" sz="1200" dirty="0"/>
+          </a:p>
+        </p:txBody>
+      </p:sp>
+      <p:sp>
+        <p:nvSpPr>
+          <p:cNvPr id="5" name="Text 3"/>
+          <p:cNvSpPr/>
+          <p:nvPr/>
+        </p:nvSpPr>
+        <p:spPr>
+          <a:xfrm>
+            <a:off x="406301" y="4434929"/>
+            <a:ext cx="8498026" cy="213271"/>
+          </a:xfrm>
+          <a:prstGeom prst="rect">
+            <a:avLst/>
+          </a:prstGeom>
+          <a:noFill/>
+          <a:ln/>
+        </p:spPr>
+        <p:txBody>
+          <a:bodyPr wrap="square" lIns="0" tIns="0" rIns="0" bIns="0" rtlCol="0" anchor="t"/>
+          <a:lstStyle/>
+          <a:p>
+            <a:pPr algn="l" indent="0" marL="0">
+              <a:lnSpc>
+                <a:spcPts val="1680"/>
+              </a:lnSpc>
+              <a:spcBef>
+                <a:spcPts val="300"/>
+              </a:spcBef>
+              <a:spcAft>
+                <a:spcPts val="300"/>
+              </a:spcAft>
+              <a:buNone/>
+            </a:pPr>
+            <a:r>
+              <a:rPr lang="en-US" sz="1200" dirty="0">
+                <a:solidFill>
+                  <a:srgbClr val="1A1A1A"/>
+                </a:solidFill>
+                <a:latin typeface="Georgia" pitchFamily="34" charset="0"/>
+                <a:ea typeface="Georgia" pitchFamily="34" charset="-122"/>
+                <a:cs typeface="Georgia" pitchFamily="34" charset="-120"/>
+              </a:rPr>
+              <a:t>Senior ·  · IKS Curriculum</a:t>
+            </a:r>
+            <a:endParaRPr lang="en-US" sz="1200" dirty="0"/>
+          </a:p>
+        </p:txBody>
+      </p:sp>
+    </p:spTree>
+  </p:cSld>
+  <p:clrMapOvr>
+    <a:masterClrMapping/>
+  </p:clrMapOvr>
+</p:sld>
+</file>
+
+<file path=ppt/slides/slide13.xml><?xml version="1.0" encoding="utf-8"?>
+<p:sld xmlns:a="http://schemas.openxmlformats.org/drawingml/2006/main" xmlns:r="http://schemas.openxmlformats.org/officeDocument/2006/relationships" xmlns:p="http://schemas.openxmlformats.org/presentationml/2006/main">
+  <p:cSld name="Slide 13">
+    <p:bg>
+      <p:bgPr>
+        <a:solidFill>
+          <a:srgbClr val="FAF7F2"/>
+        </a:solidFill>
+      </p:bgPr>
+    </p:bg>
+    <p:spTree>
+      <p:nvGrpSpPr>
+        <p:cNvPr id="1" name=""/>
+        <p:cNvGrpSpPr/>
+        <p:nvPr/>
+      </p:nvGrpSpPr>
+      <p:grpSpPr>
+        <a:xfrm>
+          <a:off x="0" y="0"/>
+          <a:ext cx="0" cy="0"/>
+          <a:chOff x="0" y="0"/>
+          <a:chExt cx="0" cy="0"/>
+        </a:xfrm>
+      </p:grpSpPr>
+      <p:sp>
+        <p:nvSpPr>
+          <p:cNvPr id="2" name="Text 0"/>
+          <p:cNvSpPr/>
+          <p:nvPr/>
+        </p:nvSpPr>
+        <p:spPr>
+          <a:xfrm>
+            <a:off x="0" y="0"/>
+            <a:ext cx="9144000" cy="101501"/>
+          </a:xfrm>
+          <a:prstGeom prst="rect">
+            <a:avLst/>
+          </a:prstGeom>
+          <a:solidFill>
+            <a:srgbClr val="5D1D2E"/>
+          </a:solidFill>
+          <a:ln/>
+        </p:spPr>
+        <p:txBody>
+          <a:bodyPr wrap="square" rtlCol="0" anchor="ctr"/>
+          <a:lstStyle/>
+          <a:p>
+            <a:pPr indent="0" marL="0">
+              <a:buNone/>
+            </a:pPr>
+            <a:endParaRPr lang="en-US" dirty="0"/>
+          </a:p>
+        </p:txBody>
+      </p:sp>
+      <p:sp>
+        <p:nvSpPr>
+          <p:cNvPr id="3" name="Text 1"/>
+          <p:cNvSpPr/>
+          <p:nvPr/>
+        </p:nvSpPr>
+        <p:spPr>
+          <a:xfrm>
+            <a:off x="406301" y="457051"/>
+            <a:ext cx="8498026" cy="274290"/>
+          </a:xfrm>
+          <a:prstGeom prst="rect">
+            <a:avLst/>
+          </a:prstGeom>
+          <a:noFill/>
+          <a:ln/>
+        </p:spPr>
+        <p:txBody>
+          <a:bodyPr wrap="square" lIns="0" tIns="0" rIns="0" bIns="0" rtlCol="0" anchor="t"/>
+          <a:lstStyle/>
+          <a:p>
+            <a:pPr algn="l" indent="0" marL="0">
+              <a:lnSpc>
+                <a:spcPts val="2160"/>
+              </a:lnSpc>
+              <a:spcBef>
+                <a:spcPts val="600"/>
+              </a:spcBef>
+              <a:spcAft>
+                <a:spcPts val="800"/>
+              </a:spcAft>
+              <a:buNone/>
+            </a:pPr>
+            <a:r>
+              <a:rPr lang="en-US" sz="1800" b="1" dirty="0">
+                <a:solidFill>
+                  <a:srgbClr val="997929"/>
+                </a:solidFill>
+                <a:latin typeface="Times New Roman" pitchFamily="34" charset="0"/>
+                <a:ea typeface="Times New Roman" pitchFamily="34" charset="-122"/>
+                <a:cs typeface="Times New Roman" pitchFamily="34" charset="-120"/>
+              </a:rPr>
+              <a:t>Wrap-up (5 min)</a:t>
+            </a:r>
+            <a:endParaRPr lang="en-US" sz="1800" dirty="0"/>
+          </a:p>
+        </p:txBody>
+      </p:sp>
+      <p:sp>
+        <p:nvSpPr>
+          <p:cNvPr id="4" name="Text 2"/>
+          <p:cNvSpPr/>
+          <p:nvPr/>
+        </p:nvSpPr>
+        <p:spPr>
+          <a:xfrm>
+            <a:off x="634901" y="883593"/>
+            <a:ext cx="8102798" cy="281880"/>
+          </a:xfrm>
+          <a:prstGeom prst="rect">
+            <a:avLst/>
+          </a:prstGeom>
+          <a:noFill/>
+          <a:ln/>
+        </p:spPr>
+        <p:txBody>
+          <a:bodyPr wrap="square" lIns="0" tIns="0" rIns="0" bIns="0" rtlCol="0" anchor="t"/>
+          <a:lstStyle/>
+          <a:p>
+            <a:pPr algn="l" marL="342900" indent="-342900">
+              <a:lnSpc>
+                <a:spcPts val="1620"/>
+              </a:lnSpc>
+              <a:spcAft>
+                <a:spcPts val="300"/>
+              </a:spcAft>
+              <a:buSzPct val="100000"/>
+              <a:buChar char="•"/>
+            </a:pPr>
+            <a:r>
+              <a:rPr lang="en-US" sz="1200" dirty="0">
+                <a:solidFill>
+                  <a:srgbClr val="1A1A1A"/>
+                </a:solidFill>
+                <a:latin typeface="Georgia" pitchFamily="34" charset="0"/>
+                <a:ea typeface="Georgia" pitchFamily="34" charset="-122"/>
+                <a:cs typeface="Georgia" pitchFamily="34" charset="-120"/>
+              </a:rPr>
+              <a:t>Preview Day 3: </a:t>
+            </a:r>
+            <a:pPr algn="l" indent="0" marL="0">
+              <a:lnSpc>
+                <a:spcPts val="1620"/>
+              </a:lnSpc>
+              <a:spcAft>
+                <a:spcPts val="300"/>
+              </a:spcAft>
+              <a:buNone/>
+            </a:pPr>
+            <a:r>
+              <a:rPr lang="en-US" sz="1200" i="1" dirty="0">
+                <a:solidFill>
+                  <a:srgbClr val="1A1A1A"/>
+                </a:solidFill>
+                <a:latin typeface="Georgia" pitchFamily="34" charset="0"/>
+                <a:ea typeface="Georgia" pitchFamily="34" charset="-122"/>
+                <a:cs typeface="Georgia" pitchFamily="34" charset="-120"/>
+              </a:rPr>
+              <a:t>"Tomorrow we read YS 2.46 closely — Patañjali's definition of āsana."</a:t>
+            </a:r>
+            <a:endParaRPr lang="en-US" sz="1200" dirty="0"/>
+          </a:p>
+        </p:txBody>
+      </p:sp>
+      <p:sp>
+        <p:nvSpPr>
+          <p:cNvPr id="5" name="Text 3"/>
+          <p:cNvSpPr/>
+          <p:nvPr/>
+        </p:nvSpPr>
+        <p:spPr>
+          <a:xfrm>
+            <a:off x="406301" y="4434929"/>
+            <a:ext cx="8498026" cy="213271"/>
+          </a:xfrm>
+          <a:prstGeom prst="rect">
+            <a:avLst/>
+          </a:prstGeom>
+          <a:noFill/>
+          <a:ln/>
+        </p:spPr>
+        <p:txBody>
+          <a:bodyPr wrap="square" lIns="0" tIns="0" rIns="0" bIns="0" rtlCol="0" anchor="t"/>
+          <a:lstStyle/>
+          <a:p>
+            <a:pPr algn="l" indent="0" marL="0">
+              <a:lnSpc>
+                <a:spcPts val="1680"/>
+              </a:lnSpc>
+              <a:spcBef>
+                <a:spcPts val="300"/>
+              </a:spcBef>
+              <a:spcAft>
+                <a:spcPts val="300"/>
+              </a:spcAft>
+              <a:buNone/>
+            </a:pPr>
+            <a:r>
+              <a:rPr lang="en-US" sz="1200" dirty="0">
+                <a:solidFill>
+                  <a:srgbClr val="1A1A1A"/>
+                </a:solidFill>
+                <a:latin typeface="Georgia" pitchFamily="34" charset="0"/>
+                <a:ea typeface="Georgia" pitchFamily="34" charset="-122"/>
+                <a:cs typeface="Georgia" pitchFamily="34" charset="-120"/>
+              </a:rPr>
+              <a:t>Senior ·  · IKS Curriculum</a:t>
+            </a:r>
+            <a:endParaRPr lang="en-US" sz="1200" dirty="0"/>
+          </a:p>
+        </p:txBody>
+      </p:sp>
+    </p:spTree>
+  </p:cSld>
+  <p:clrMapOvr>
+    <a:masterClrMapping/>
+  </p:clrMapOvr>
+</p:sld>
+</file>
+
+<file path=ppt/slides/slide14.xml><?xml version="1.0" encoding="utf-8"?>
+<p:sld xmlns:a="http://schemas.openxmlformats.org/drawingml/2006/main" xmlns:r="http://schemas.openxmlformats.org/officeDocument/2006/relationships" xmlns:p="http://schemas.openxmlformats.org/presentationml/2006/main">
+  <p:cSld name="Slide 14">
+    <p:bg>
+      <p:bgPr>
+        <a:solidFill>
+          <a:srgbClr val="FAF7F2"/>
+        </a:solidFill>
+      </p:bgPr>
+    </p:bg>
+    <p:spTree>
+      <p:nvGrpSpPr>
+        <p:cNvPr id="1" name=""/>
+        <p:cNvGrpSpPr/>
+        <p:nvPr/>
+      </p:nvGrpSpPr>
+      <p:grpSpPr>
+        <a:xfrm>
+          <a:off x="0" y="0"/>
+          <a:ext cx="0" cy="0"/>
+          <a:chOff x="0" y="0"/>
+          <a:chExt cx="0" cy="0"/>
+        </a:xfrm>
+      </p:grpSpPr>
+      <p:sp>
+        <p:nvSpPr>
+          <p:cNvPr id="2" name="Text 0"/>
+          <p:cNvSpPr/>
+          <p:nvPr/>
+        </p:nvSpPr>
+        <p:spPr>
+          <a:xfrm>
+            <a:off x="0" y="0"/>
+            <a:ext cx="9144000" cy="101501"/>
+          </a:xfrm>
+          <a:prstGeom prst="rect">
+            <a:avLst/>
+          </a:prstGeom>
+          <a:solidFill>
+            <a:srgbClr val="5D1D2E"/>
+          </a:solidFill>
+          <a:ln/>
+        </p:spPr>
+        <p:txBody>
+          <a:bodyPr wrap="square" rtlCol="0" anchor="ctr"/>
+          <a:lstStyle/>
+          <a:p>
+            <a:pPr indent="0" marL="0">
+              <a:buNone/>
+            </a:pPr>
+            <a:endParaRPr lang="en-US" dirty="0"/>
+          </a:p>
+        </p:txBody>
+      </p:sp>
+      <p:sp>
+        <p:nvSpPr>
+          <p:cNvPr id="3" name="Text 1"/>
+          <p:cNvSpPr/>
+          <p:nvPr/>
+        </p:nvSpPr>
+        <p:spPr>
+          <a:xfrm>
+            <a:off x="406301" y="457051"/>
+            <a:ext cx="8498026" cy="274290"/>
+          </a:xfrm>
+          <a:prstGeom prst="rect">
+            <a:avLst/>
+          </a:prstGeom>
+          <a:noFill/>
+          <a:ln/>
+        </p:spPr>
+        <p:txBody>
+          <a:bodyPr wrap="square" lIns="0" tIns="0" rIns="0" bIns="0" rtlCol="0" anchor="t"/>
+          <a:lstStyle/>
+          <a:p>
+            <a:pPr algn="l" indent="0" marL="0">
+              <a:lnSpc>
+                <a:spcPts val="2160"/>
+              </a:lnSpc>
+              <a:spcBef>
+                <a:spcPts val="600"/>
+              </a:spcBef>
+              <a:spcAft>
+                <a:spcPts val="800"/>
+              </a:spcAft>
+              <a:buNone/>
+            </a:pPr>
+            <a:r>
+              <a:rPr lang="en-US" sz="1800" b="1" dirty="0">
+                <a:solidFill>
+                  <a:srgbClr val="997929"/>
+                </a:solidFill>
+                <a:latin typeface="Times New Roman" pitchFamily="34" charset="0"/>
+                <a:ea typeface="Times New Roman" pitchFamily="34" charset="-122"/>
+                <a:cs typeface="Times New Roman" pitchFamily="34" charset="-120"/>
+              </a:rPr>
+              <a:t>Differentiation</a:t>
+            </a:r>
+            <a:endParaRPr lang="en-US" sz="1800" dirty="0"/>
+          </a:p>
+        </p:txBody>
+      </p:sp>
+      <p:sp>
+        <p:nvSpPr>
+          <p:cNvPr id="4" name="Text 2"/>
+          <p:cNvSpPr/>
+          <p:nvPr/>
+        </p:nvSpPr>
+        <p:spPr>
+          <a:xfrm>
+            <a:off x="634901" y="883593"/>
+            <a:ext cx="8102798" cy="525661"/>
+          </a:xfrm>
+          <a:prstGeom prst="rect">
+            <a:avLst/>
+          </a:prstGeom>
+          <a:noFill/>
+          <a:ln/>
+        </p:spPr>
+        <p:txBody>
+          <a:bodyPr wrap="square" lIns="0" tIns="0" rIns="0" bIns="0" rtlCol="0" anchor="t"/>
+          <a:lstStyle/>
+          <a:p>
+            <a:pPr algn="l" marL="342900" indent="-342900">
+              <a:lnSpc>
+                <a:spcPts val="1620"/>
+              </a:lnSpc>
+              <a:spcAft>
+                <a:spcPts val="300"/>
+              </a:spcAft>
+              <a:buSzPct val="100000"/>
+              <a:buChar char="•"/>
+            </a:pPr>
+            <a:r>
+              <a:rPr lang="en-US" sz="1200" b="1" dirty="0">
+                <a:solidFill>
+                  <a:srgbClr val="1A1A1A"/>
+                </a:solidFill>
+                <a:latin typeface="Georgia" pitchFamily="34" charset="0"/>
+                <a:ea typeface="Georgia" pitchFamily="34" charset="-122"/>
+                <a:cs typeface="Georgia" pitchFamily="34" charset="-120"/>
+              </a:rPr>
+              <a:t>Tier up:</a:t>
+            </a:r>
+            <a:pPr algn="l" indent="0" marL="0">
+              <a:lnSpc>
+                <a:spcPts val="1620"/>
+              </a:lnSpc>
+              <a:spcAft>
+                <a:spcPts val="300"/>
+              </a:spcAft>
+              <a:buNone/>
+            </a:pPr>
+            <a:r>
+              <a:rPr lang="en-US" sz="1200" dirty="0">
+                <a:solidFill>
+                  <a:srgbClr val="1A1A1A"/>
+                </a:solidFill>
+                <a:latin typeface="Georgia" pitchFamily="34" charset="0"/>
+                <a:ea typeface="Georgia" pitchFamily="34" charset="-122"/>
+                <a:cs typeface="Georgia" pitchFamily="34" charset="-120"/>
+              </a:rPr>
+              <a:t> Memorise the 5 </a:t>
+            </a:r>
+            <a:pPr algn="l" indent="0" marL="0">
+              <a:lnSpc>
+                <a:spcPts val="1620"/>
+              </a:lnSpc>
+              <a:spcAft>
+                <a:spcPts val="300"/>
+              </a:spcAft>
+              <a:buNone/>
+            </a:pPr>
+            <a:r>
+              <a:rPr lang="en-US" sz="1200" i="1" dirty="0">
+                <a:solidFill>
+                  <a:srgbClr val="1A1A1A"/>
+                </a:solidFill>
+                <a:latin typeface="Georgia" pitchFamily="34" charset="0"/>
+                <a:ea typeface="Georgia" pitchFamily="34" charset="-122"/>
+                <a:cs typeface="Georgia" pitchFamily="34" charset="-120"/>
+              </a:rPr>
+              <a:t>yamas</a:t>
+            </a:r>
+            <a:pPr algn="l" indent="0" marL="0">
+              <a:lnSpc>
+                <a:spcPts val="1620"/>
+              </a:lnSpc>
+              <a:spcAft>
+                <a:spcPts val="300"/>
+              </a:spcAft>
+              <a:buNone/>
+            </a:pPr>
+            <a:r>
+              <a:rPr lang="en-US" sz="1200" dirty="0">
+                <a:solidFill>
+                  <a:srgbClr val="1A1A1A"/>
+                </a:solidFill>
+                <a:latin typeface="Georgia" pitchFamily="34" charset="0"/>
+                <a:ea typeface="Georgia" pitchFamily="34" charset="-122"/>
+                <a:cs typeface="Georgia" pitchFamily="34" charset="-120"/>
+              </a:rPr>
+              <a:t> and 5 </a:t>
+            </a:r>
+            <a:pPr algn="l" indent="0" marL="0">
+              <a:lnSpc>
+                <a:spcPts val="1620"/>
+              </a:lnSpc>
+              <a:spcAft>
+                <a:spcPts val="300"/>
+              </a:spcAft>
+              <a:buNone/>
+            </a:pPr>
+            <a:r>
+              <a:rPr lang="en-US" sz="1200" i="1" dirty="0">
+                <a:solidFill>
+                  <a:srgbClr val="1A1A1A"/>
+                </a:solidFill>
+                <a:latin typeface="Georgia" pitchFamily="34" charset="0"/>
+                <a:ea typeface="Georgia" pitchFamily="34" charset="-122"/>
+                <a:cs typeface="Georgia" pitchFamily="34" charset="-120"/>
+              </a:rPr>
+              <a:t>niyamas</a:t>
+            </a:r>
+            <a:pPr algn="l" indent="0" marL="0">
+              <a:lnSpc>
+                <a:spcPts val="1620"/>
+              </a:lnSpc>
+              <a:spcAft>
+                <a:spcPts val="300"/>
+              </a:spcAft>
+              <a:buNone/>
+            </a:pPr>
+            <a:r>
+              <a:rPr lang="en-US" sz="1200" dirty="0">
+                <a:solidFill>
+                  <a:srgbClr val="1A1A1A"/>
+                </a:solidFill>
+                <a:latin typeface="Georgia" pitchFamily="34" charset="0"/>
+                <a:ea typeface="Georgia" pitchFamily="34" charset="-122"/>
+                <a:cs typeface="Georgia" pitchFamily="34" charset="-120"/>
+              </a:rPr>
+              <a:t> in Sanskrit.</a:t>
+            </a:r>
+            <a:endParaRPr lang="en-US" sz="1200" dirty="0"/>
+          </a:p>
+          <a:p>
+            <a:pPr algn="l" marL="342900" indent="-342900">
+              <a:lnSpc>
+                <a:spcPts val="1620"/>
+              </a:lnSpc>
+              <a:spcAft>
+                <a:spcPts val="300"/>
+              </a:spcAft>
+              <a:buSzPct val="100000"/>
+              <a:buChar char="•"/>
+            </a:pPr>
+            <a:r>
+              <a:rPr lang="en-US" sz="1200" b="1" dirty="0">
+                <a:solidFill>
+                  <a:srgbClr val="1A1A1A"/>
+                </a:solidFill>
+                <a:latin typeface="Georgia" pitchFamily="34" charset="0"/>
+                <a:ea typeface="Georgia" pitchFamily="34" charset="-122"/>
+                <a:cs typeface="Georgia" pitchFamily="34" charset="-120"/>
+              </a:rPr>
+              <a:t>Tier down:</a:t>
+            </a:r>
+            <a:pPr algn="l" indent="0" marL="0">
+              <a:lnSpc>
+                <a:spcPts val="1620"/>
+              </a:lnSpc>
+              <a:spcAft>
+                <a:spcPts val="300"/>
+              </a:spcAft>
+              <a:buNone/>
+            </a:pPr>
+            <a:r>
+              <a:rPr lang="en-US" sz="1200" dirty="0">
+                <a:solidFill>
+                  <a:srgbClr val="1A1A1A"/>
+                </a:solidFill>
+                <a:latin typeface="Georgia" pitchFamily="34" charset="0"/>
+                <a:ea typeface="Georgia" pitchFamily="34" charset="-122"/>
+                <a:cs typeface="Georgia" pitchFamily="34" charset="-120"/>
+              </a:rPr>
+              <a:t> Memorise the 8 limbs only.</a:t>
+            </a:r>
+            <a:endParaRPr lang="en-US" sz="1200" dirty="0"/>
+          </a:p>
+        </p:txBody>
+      </p:sp>
+      <p:sp>
+        <p:nvSpPr>
+          <p:cNvPr id="5" name="Text 3"/>
+          <p:cNvSpPr/>
+          <p:nvPr/>
+        </p:nvSpPr>
+        <p:spPr>
+          <a:xfrm>
+            <a:off x="406301" y="4434929"/>
+            <a:ext cx="8498026" cy="213271"/>
+          </a:xfrm>
+          <a:prstGeom prst="rect">
+            <a:avLst/>
+          </a:prstGeom>
+          <a:noFill/>
+          <a:ln/>
+        </p:spPr>
+        <p:txBody>
+          <a:bodyPr wrap="square" lIns="0" tIns="0" rIns="0" bIns="0" rtlCol="0" anchor="t"/>
+          <a:lstStyle/>
+          <a:p>
+            <a:pPr algn="l" indent="0" marL="0">
+              <a:lnSpc>
+                <a:spcPts val="1680"/>
+              </a:lnSpc>
+              <a:spcBef>
+                <a:spcPts val="300"/>
+              </a:spcBef>
+              <a:spcAft>
+                <a:spcPts val="300"/>
+              </a:spcAft>
+              <a:buNone/>
+            </a:pPr>
+            <a:r>
+              <a:rPr lang="en-US" sz="1200" dirty="0">
+                <a:solidFill>
+                  <a:srgbClr val="1A1A1A"/>
+                </a:solidFill>
+                <a:latin typeface="Georgia" pitchFamily="34" charset="0"/>
+                <a:ea typeface="Georgia" pitchFamily="34" charset="-122"/>
+                <a:cs typeface="Georgia" pitchFamily="34" charset="-120"/>
+              </a:rPr>
+              <a:t>Senior ·  · IKS Curriculum</a:t>
+            </a:r>
+            <a:endParaRPr lang="en-US" sz="1200" dirty="0"/>
+          </a:p>
+        </p:txBody>
+      </p:sp>
+    </p:spTree>
+  </p:cSld>
+  <p:clrMapOvr>
+    <a:masterClrMapping/>
+  </p:clrMapOvr>
+</p:sld>
+</file>
+
+<file path=ppt/slides/slide15.xml><?xml version="1.0" encoding="utf-8"?>
+<p:sld xmlns:a="http://schemas.openxmlformats.org/drawingml/2006/main" xmlns:r="http://schemas.openxmlformats.org/officeDocument/2006/relationships" xmlns:p="http://schemas.openxmlformats.org/presentationml/2006/main">
+  <p:cSld name="Slide 15">
+    <p:bg>
+      <p:bgPr>
+        <a:solidFill>
+          <a:srgbClr val="FAF7F2"/>
+        </a:solidFill>
+      </p:bgPr>
+    </p:bg>
+    <p:spTree>
+      <p:nvGrpSpPr>
+        <p:cNvPr id="1" name=""/>
+        <p:cNvGrpSpPr/>
+        <p:nvPr/>
+      </p:nvGrpSpPr>
+      <p:grpSpPr>
+        <a:xfrm>
+          <a:off x="0" y="0"/>
+          <a:ext cx="0" cy="0"/>
+          <a:chOff x="0" y="0"/>
+          <a:chExt cx="0" cy="0"/>
+        </a:xfrm>
+      </p:grpSpPr>
+      <p:sp>
+        <p:nvSpPr>
+          <p:cNvPr id="2" name="Text 0"/>
+          <p:cNvSpPr/>
+          <p:nvPr/>
+        </p:nvSpPr>
+        <p:spPr>
+          <a:xfrm>
+            <a:off x="0" y="0"/>
+            <a:ext cx="9144000" cy="101501"/>
+          </a:xfrm>
+          <a:prstGeom prst="rect">
+            <a:avLst/>
+          </a:prstGeom>
+          <a:solidFill>
+            <a:srgbClr val="5D1D2E"/>
+          </a:solidFill>
+          <a:ln/>
+        </p:spPr>
+        <p:txBody>
+          <a:bodyPr wrap="square" rtlCol="0" anchor="ctr"/>
+          <a:lstStyle/>
+          <a:p>
+            <a:pPr indent="0" marL="0">
+              <a:buNone/>
+            </a:pPr>
+            <a:endParaRPr lang="en-US" dirty="0"/>
+          </a:p>
+        </p:txBody>
+      </p:sp>
+      <p:sp>
+        <p:nvSpPr>
+          <p:cNvPr id="3" name="Text 1"/>
+          <p:cNvSpPr/>
+          <p:nvPr/>
+        </p:nvSpPr>
+        <p:spPr>
+          <a:xfrm>
+            <a:off x="406301" y="457051"/>
+            <a:ext cx="8498026" cy="274290"/>
+          </a:xfrm>
+          <a:prstGeom prst="rect">
+            <a:avLst/>
+          </a:prstGeom>
+          <a:noFill/>
+          <a:ln/>
+        </p:spPr>
+        <p:txBody>
+          <a:bodyPr wrap="square" lIns="0" tIns="0" rIns="0" bIns="0" rtlCol="0" anchor="t"/>
+          <a:lstStyle/>
+          <a:p>
+            <a:pPr algn="l" indent="0" marL="0">
+              <a:lnSpc>
+                <a:spcPts val="2160"/>
+              </a:lnSpc>
+              <a:spcBef>
+                <a:spcPts val="600"/>
+              </a:spcBef>
+              <a:spcAft>
+                <a:spcPts val="800"/>
+              </a:spcAft>
+              <a:buNone/>
+            </a:pPr>
+            <a:r>
+              <a:rPr lang="en-US" sz="1800" b="1" dirty="0">
+                <a:solidFill>
+                  <a:srgbClr val="997929"/>
+                </a:solidFill>
+                <a:latin typeface="Times New Roman" pitchFamily="34" charset="0"/>
+                <a:ea typeface="Times New Roman" pitchFamily="34" charset="-122"/>
+                <a:cs typeface="Times New Roman" pitchFamily="34" charset="-120"/>
+              </a:rPr>
+              <a:t>Teacher notes</a:t>
+            </a:r>
+            <a:endParaRPr lang="en-US" sz="1800" dirty="0"/>
+          </a:p>
+        </p:txBody>
+      </p:sp>
+      <p:sp>
+        <p:nvSpPr>
+          <p:cNvPr id="4" name="Text 2"/>
+          <p:cNvSpPr/>
+          <p:nvPr/>
+        </p:nvSpPr>
+        <p:spPr>
+          <a:xfrm>
+            <a:off x="634901" y="883593"/>
+            <a:ext cx="8102798" cy="487561"/>
+          </a:xfrm>
+          <a:prstGeom prst="rect">
+            <a:avLst/>
+          </a:prstGeom>
+          <a:noFill/>
+          <a:ln/>
+        </p:spPr>
+        <p:txBody>
+          <a:bodyPr wrap="square" lIns="0" tIns="0" rIns="0" bIns="0" rtlCol="0" anchor="t"/>
+          <a:lstStyle/>
+          <a:p>
+            <a:pPr algn="l" marL="342900" indent="-342900">
+              <a:lnSpc>
+                <a:spcPts val="1620"/>
+              </a:lnSpc>
+              <a:spcAft>
+                <a:spcPts val="300"/>
+              </a:spcAft>
+              <a:buSzPct val="100000"/>
+              <a:buChar char="•"/>
+            </a:pPr>
+            <a:r>
+              <a:rPr lang="en-US" sz="1200" dirty="0">
+                <a:solidFill>
+                  <a:srgbClr val="1A1A1A"/>
+                </a:solidFill>
+                <a:latin typeface="Georgia" pitchFamily="34" charset="0"/>
+                <a:ea typeface="Georgia" pitchFamily="34" charset="-122"/>
+                <a:cs typeface="Georgia" pitchFamily="34" charset="-120"/>
+              </a:rPr>
+              <a:t>The "proportions" observation is a powerful teaching moment. Most students assume yoga = āsana. The 3-out-of-196 statistic reframes this.</a:t>
+            </a:r>
+            <a:endParaRPr lang="en-US" sz="1200" dirty="0"/>
+          </a:p>
+        </p:txBody>
+      </p:sp>
+      <p:sp>
+        <p:nvSpPr>
+          <p:cNvPr id="5" name="Text 3"/>
+          <p:cNvSpPr/>
+          <p:nvPr/>
+        </p:nvSpPr>
+        <p:spPr>
+          <a:xfrm>
+            <a:off x="406301" y="4434929"/>
+            <a:ext cx="8498026" cy="213271"/>
+          </a:xfrm>
+          <a:prstGeom prst="rect">
+            <a:avLst/>
+          </a:prstGeom>
+          <a:noFill/>
+          <a:ln/>
+        </p:spPr>
+        <p:txBody>
+          <a:bodyPr wrap="square" lIns="0" tIns="0" rIns="0" bIns="0" rtlCol="0" anchor="t"/>
+          <a:lstStyle/>
+          <a:p>
+            <a:pPr algn="l" indent="0" marL="0">
+              <a:lnSpc>
+                <a:spcPts val="1680"/>
+              </a:lnSpc>
+              <a:spcBef>
+                <a:spcPts val="300"/>
+              </a:spcBef>
+              <a:spcAft>
+                <a:spcPts val="300"/>
+              </a:spcAft>
+              <a:buNone/>
+            </a:pPr>
+            <a:r>
+              <a:rPr lang="en-US" sz="1200" dirty="0">
+                <a:solidFill>
+                  <a:srgbClr val="1A1A1A"/>
+                </a:solidFill>
+                <a:latin typeface="Georgia" pitchFamily="34" charset="0"/>
+                <a:ea typeface="Georgia" pitchFamily="34" charset="-122"/>
+                <a:cs typeface="Georgia" pitchFamily="34" charset="-120"/>
+              </a:rPr>
+              <a:t>Senior ·  · IKS Curriculum</a:t>
+            </a:r>
+            <a:endParaRPr lang="en-US" sz="1200" dirty="0"/>
+          </a:p>
+        </p:txBody>
+      </p:sp>
+    </p:spTree>
+  </p:cSld>
+  <p:clrMapOvr>
+    <a:masterClrMapping/>
+  </p:clrMapOvr>
+</p:sld>
+</file>
+
+<file path=ppt/slides/slide16.xml><?xml version="1.0" encoding="utf-8"?>
+<p:sld xmlns:a="http://schemas.openxmlformats.org/drawingml/2006/main" xmlns:r="http://schemas.openxmlformats.org/officeDocument/2006/relationships" xmlns:p="http://schemas.openxmlformats.org/presentationml/2006/main">
+  <p:cSld name="Slide 16">
+    <p:bg>
+      <p:bgPr>
+        <a:solidFill>
+          <a:srgbClr val="FAF7F2"/>
+        </a:solidFill>
+      </p:bgPr>
+    </p:bg>
+    <p:spTree>
+      <p:nvGrpSpPr>
+        <p:cNvPr id="1" name=""/>
+        <p:cNvGrpSpPr/>
+        <p:nvPr/>
+      </p:nvGrpSpPr>
+      <p:grpSpPr>
+        <a:xfrm>
+          <a:off x="0" y="0"/>
+          <a:ext cx="0" cy="0"/>
+          <a:chOff x="0" y="0"/>
+          <a:chExt cx="0" cy="0"/>
+        </a:xfrm>
+      </p:grpSpPr>
+      <p:sp>
+        <p:nvSpPr>
+          <p:cNvPr id="2" name="Text 0"/>
+          <p:cNvSpPr/>
+          <p:nvPr/>
+        </p:nvSpPr>
+        <p:spPr>
+          <a:xfrm>
+            <a:off x="0" y="0"/>
+            <a:ext cx="9144000" cy="101501"/>
+          </a:xfrm>
+          <a:prstGeom prst="rect">
+            <a:avLst/>
+          </a:prstGeom>
+          <a:solidFill>
+            <a:srgbClr val="5D1D2E"/>
+          </a:solidFill>
+          <a:ln/>
+        </p:spPr>
+        <p:txBody>
+          <a:bodyPr wrap="square" rtlCol="0" anchor="ctr"/>
+          <a:lstStyle/>
+          <a:p>
+            <a:pPr indent="0" marL="0">
+              <a:buNone/>
+            </a:pPr>
+            <a:endParaRPr lang="en-US" dirty="0"/>
+          </a:p>
+        </p:txBody>
+      </p:sp>
+      <p:sp>
+        <p:nvSpPr>
+          <p:cNvPr id="3" name="Text 1"/>
+          <p:cNvSpPr/>
+          <p:nvPr/>
+        </p:nvSpPr>
+        <p:spPr>
+          <a:xfrm>
+            <a:off x="406301" y="457051"/>
+            <a:ext cx="8498026" cy="274290"/>
+          </a:xfrm>
+          <a:prstGeom prst="rect">
+            <a:avLst/>
+          </a:prstGeom>
+          <a:noFill/>
+          <a:ln/>
+        </p:spPr>
+        <p:txBody>
+          <a:bodyPr wrap="square" lIns="0" tIns="0" rIns="0" bIns="0" rtlCol="0" anchor="t"/>
+          <a:lstStyle/>
+          <a:p>
+            <a:pPr algn="l" indent="0" marL="0">
+              <a:lnSpc>
+                <a:spcPts val="2160"/>
+              </a:lnSpc>
+              <a:spcBef>
+                <a:spcPts val="600"/>
+              </a:spcBef>
+              <a:spcAft>
+                <a:spcPts val="800"/>
+              </a:spcAft>
+              <a:buNone/>
+            </a:pPr>
+            <a:r>
+              <a:rPr lang="en-US" sz="1800" b="1" dirty="0">
+                <a:solidFill>
+                  <a:srgbClr val="997929"/>
+                </a:solidFill>
+                <a:latin typeface="Times New Roman" pitchFamily="34" charset="0"/>
+                <a:ea typeface="Times New Roman" pitchFamily="34" charset="-122"/>
+                <a:cs typeface="Times New Roman" pitchFamily="34" charset="-120"/>
+              </a:rPr>
+              <a:t>Citation(s) used</a:t>
+            </a:r>
+            <a:endParaRPr lang="en-US" sz="1800" dirty="0"/>
+          </a:p>
+        </p:txBody>
+      </p:sp>
+      <p:sp>
+        <p:nvSpPr>
+          <p:cNvPr id="4" name="Text 2"/>
+          <p:cNvSpPr/>
+          <p:nvPr/>
+        </p:nvSpPr>
+        <p:spPr>
+          <a:xfrm>
+            <a:off x="634901" y="883593"/>
+            <a:ext cx="8102798" cy="544711"/>
+          </a:xfrm>
+          <a:prstGeom prst="rect">
+            <a:avLst/>
+          </a:prstGeom>
+          <a:noFill/>
+          <a:ln/>
+        </p:spPr>
+        <p:txBody>
+          <a:bodyPr wrap="square" lIns="0" tIns="0" rIns="0" bIns="0" rtlCol="0" anchor="t"/>
+          <a:lstStyle/>
+          <a:p>
+            <a:pPr algn="l" marL="342900" indent="-342900">
+              <a:lnSpc>
+                <a:spcPts val="1620"/>
+              </a:lnSpc>
+              <a:spcAft>
+                <a:spcPts val="300"/>
+              </a:spcAft>
+              <a:buSzPct val="100000"/>
+              <a:buChar char="•"/>
+            </a:pPr>
+            <a:r>
+              <a:rPr lang="en-US" sz="1200" dirty="0">
+                <a:solidFill>
+                  <a:srgbClr val="1A1A1A"/>
+                </a:solidFill>
+                <a:latin typeface="Georgia" pitchFamily="34" charset="0"/>
+                <a:ea typeface="Georgia" pitchFamily="34" charset="-122"/>
+                <a:cs typeface="Georgia" pitchFamily="34" charset="-120"/>
+              </a:rPr>
+              <a:t>Patañjali YS 2.29, 2.30, 2.32, 2.46, 2.49 — Bryant (2009).</a:t>
+            </a:r>
+            <a:endParaRPr lang="en-US" sz="1200" dirty="0"/>
+          </a:p>
+          <a:p>
+            <a:pPr algn="l" marL="342900" indent="-342900">
+              <a:lnSpc>
+                <a:spcPts val="1620"/>
+              </a:lnSpc>
+              <a:spcAft>
+                <a:spcPts val="300"/>
+              </a:spcAft>
+              <a:buSzPct val="100000"/>
+              <a:buChar char="•"/>
+            </a:pPr>
+            <a:r>
+              <a:rPr lang="en-US" sz="1200" dirty="0">
+                <a:solidFill>
+                  <a:srgbClr val="1A1A1A"/>
+                </a:solidFill>
+                <a:latin typeface="Georgia" pitchFamily="34" charset="0"/>
+                <a:ea typeface="Georgia" pitchFamily="34" charset="-122"/>
+                <a:cs typeface="Georgia" pitchFamily="34" charset="-120"/>
+              </a:rPr>
               <a:t>vidya-karana RAG cache </a:t>
             </a:r>
             <a:pPr algn="l" indent="0" marL="0">
@@ -2553,7 +4062,7 @@
       </p:sp>
       <p:sp>
         <p:nvSpPr>
-          <p:cNvPr id="6" name="Text 4"/>
+          <p:cNvPr id="5" name="Text 3"/>
           <p:cNvSpPr/>
           <p:nvPr/>
         </p:nvSpPr>
@@ -2703,7 +4212,7 @@
                 <a:ea typeface="Times New Roman" pitchFamily="34" charset="-122"/>
                 <a:cs typeface="Times New Roman" pitchFamily="34" charset="-120"/>
               </a:rPr>
-              <a:t>Materials</a:t>
+              <a:t>Learning objective</a:t>
             </a:r>
             <a:endParaRPr lang="en-US" sz="1800" dirty="0"/>
           </a:p>
@@ -2718,7 +4227,7 @@
         <p:spPr>
           <a:xfrm>
             <a:off x="406301" y="870942"/>
-            <a:ext cx="8498026" cy="213271"/>
+            <a:ext cx="8498026" cy="426541"/>
           </a:xfrm>
           <a:prstGeom prst="rect">
             <a:avLst/>
@@ -2751,7 +4260,7 @@
                 <a:ea typeface="Georgia" pitchFamily="34" charset="-122"/>
                 <a:cs typeface="Georgia" pitchFamily="34" charset="-120"/>
               </a:rPr>
-              <a:t>– Mats – Eight-limbs wall chart – YS 2.29 + 2.30, 2.32, 2.46, 2.49, 3.1, 3.2, 3.3 (key sūtras for each limb)</a:t>
+              <a:t>Students enumerate the eight limbs with Patañjali's classical definitions and locate the limbs within the Sāṅkhya-Yoga framework.</a:t>
             </a:r>
             <a:endParaRPr lang="en-US" sz="1200" dirty="0"/>
           </a:p>
@@ -2909,7 +4418,7 @@
                 <a:ea typeface="Times New Roman" pitchFamily="34" charset="-122"/>
                 <a:cs typeface="Times New Roman" pitchFamily="34" charset="-120"/>
               </a:rPr>
-              <a:t>Flow</a:t>
+              <a:t>Materials</a:t>
             </a:r>
             <a:endParaRPr lang="en-US" sz="1800" dirty="0"/>
           </a:p>
@@ -2918,6 +4427,100 @@
       <p:sp>
         <p:nvSpPr>
           <p:cNvPr id="4" name="Text 2"/>
+          <p:cNvSpPr/>
+          <p:nvPr/>
+        </p:nvSpPr>
+        <p:spPr>
+          <a:xfrm>
+            <a:off x="634901" y="883593"/>
+            <a:ext cx="8102798" cy="769441"/>
+          </a:xfrm>
+          <a:prstGeom prst="rect">
+            <a:avLst/>
+          </a:prstGeom>
+          <a:noFill/>
+          <a:ln/>
+        </p:spPr>
+        <p:txBody>
+          <a:bodyPr wrap="square" lIns="0" tIns="0" rIns="0" bIns="0" rtlCol="0" anchor="t"/>
+          <a:lstStyle/>
+          <a:p>
+            <a:pPr algn="l" marL="342900" indent="-342900">
+              <a:lnSpc>
+                <a:spcPts val="1620"/>
+              </a:lnSpc>
+              <a:spcAft>
+                <a:spcPts val="300"/>
+              </a:spcAft>
+              <a:buSzPct val="100000"/>
+              <a:buChar char="•"/>
+            </a:pPr>
+            <a:r>
+              <a:rPr lang="en-US" sz="1200" dirty="0">
+                <a:solidFill>
+                  <a:srgbClr val="1A1A1A"/>
+                </a:solidFill>
+                <a:latin typeface="Georgia" pitchFamily="34" charset="0"/>
+                <a:ea typeface="Georgia" pitchFamily="34" charset="-122"/>
+                <a:cs typeface="Georgia" pitchFamily="34" charset="-120"/>
+              </a:rPr>
+              <a:t>Mats</a:t>
+            </a:r>
+            <a:endParaRPr lang="en-US" sz="1200" dirty="0"/>
+          </a:p>
+          <a:p>
+            <a:pPr algn="l" marL="342900" indent="-342900">
+              <a:lnSpc>
+                <a:spcPts val="1620"/>
+              </a:lnSpc>
+              <a:spcAft>
+                <a:spcPts val="300"/>
+              </a:spcAft>
+              <a:buSzPct val="100000"/>
+              <a:buChar char="•"/>
+            </a:pPr>
+            <a:r>
+              <a:rPr lang="en-US" sz="1200" dirty="0">
+                <a:solidFill>
+                  <a:srgbClr val="1A1A1A"/>
+                </a:solidFill>
+                <a:latin typeface="Georgia" pitchFamily="34" charset="0"/>
+                <a:ea typeface="Georgia" pitchFamily="34" charset="-122"/>
+                <a:cs typeface="Georgia" pitchFamily="34" charset="-120"/>
+              </a:rPr>
+              <a:t>Eight-limbs wall chart</a:t>
+            </a:r>
+            <a:endParaRPr lang="en-US" sz="1200" dirty="0"/>
+          </a:p>
+          <a:p>
+            <a:pPr algn="l" marL="342900" indent="-342900">
+              <a:lnSpc>
+                <a:spcPts val="1620"/>
+              </a:lnSpc>
+              <a:spcAft>
+                <a:spcPts val="300"/>
+              </a:spcAft>
+              <a:buSzPct val="100000"/>
+              <a:buChar char="•"/>
+            </a:pPr>
+            <a:r>
+              <a:rPr lang="en-US" sz="1200" dirty="0">
+                <a:solidFill>
+                  <a:srgbClr val="1A1A1A"/>
+                </a:solidFill>
+                <a:latin typeface="Georgia" pitchFamily="34" charset="0"/>
+                <a:ea typeface="Georgia" pitchFamily="34" charset="-122"/>
+                <a:cs typeface="Georgia" pitchFamily="34" charset="-120"/>
+              </a:rPr>
+              <a:t>YS 2.29 + 2.30, 2.32, 2.46, 2.49, 3.1, 3.2, 3.3 (key sūtras for each limb)</a:t>
+            </a:r>
+            <a:endParaRPr lang="en-US" sz="1200" dirty="0"/>
+          </a:p>
+        </p:txBody>
+      </p:sp>
+      <p:sp>
+        <p:nvSpPr>
+          <p:cNvPr id="5" name="Text 3"/>
           <p:cNvSpPr/>
           <p:nvPr/>
         </p:nvSpPr>
@@ -3067,7 +4670,7 @@
                 <a:ea typeface="Times New Roman" pitchFamily="34" charset="-122"/>
                 <a:cs typeface="Times New Roman" pitchFamily="34" charset="-120"/>
               </a:rPr>
-              <a:t>Settle (3 min)</a:t>
+              <a:t>Flow</a:t>
             </a:r>
             <a:endParaRPr lang="en-US" sz="1800" dirty="0"/>
           </a:p>
@@ -3225,7 +4828,7 @@
                 <a:ea typeface="Times New Roman" pitchFamily="34" charset="-122"/>
                 <a:cs typeface="Times New Roman" pitchFamily="34" charset="-120"/>
               </a:rPr>
-              <a:t>Core (20 min)</a:t>
+              <a:t>Settle (3 min)</a:t>
             </a:r>
             <a:endParaRPr lang="en-US" sz="1800" dirty="0"/>
           </a:p>
@@ -3239,1137 +4842,7 @@
         </p:nvSpPr>
         <p:spPr>
           <a:xfrm>
-            <a:off x="634901" y="883593"/>
-            <a:ext cx="8102798" cy="281880"/>
-          </a:xfrm>
-          <a:prstGeom prst="rect">
-            <a:avLst/>
-          </a:prstGeom>
-          <a:noFill/>
-          <a:ln/>
-        </p:spPr>
-        <p:txBody>
-          <a:bodyPr wrap="square" lIns="0" tIns="0" rIns="0" bIns="0" rtlCol="0" anchor="t"/>
-          <a:lstStyle/>
-          <a:p>
-            <a:pPr algn="l" marL="342900" indent="-342900">
-              <a:lnSpc>
-                <a:spcPts val="1620"/>
-              </a:lnSpc>
-              <a:spcAft>
-                <a:spcPts val="300"/>
-              </a:spcAft>
-              <a:buSzPct val="100000"/>
-              <a:buChar char="•"/>
-            </a:pPr>
-            <a:r>
-              <a:rPr lang="en-US" sz="1200" b="1" dirty="0">
-                <a:solidFill>
-                  <a:srgbClr val="1A1A1A"/>
-                </a:solidFill>
-                <a:latin typeface="Georgia" pitchFamily="34" charset="0"/>
-                <a:ea typeface="Georgia" pitchFamily="34" charset="-122"/>
-                <a:cs typeface="Georgia" pitchFamily="34" charset="-120"/>
-              </a:rPr>
-              <a:t>Read YS 2.29:</a:t>
-            </a:r>
-            <a:endParaRPr lang="en-US" sz="1200" dirty="0"/>
-          </a:p>
-        </p:txBody>
-      </p:sp>
-      <p:sp>
-        <p:nvSpPr>
-          <p:cNvPr id="5" name="Text 3"/>
-          <p:cNvSpPr/>
-          <p:nvPr/>
-        </p:nvSpPr>
-        <p:spPr>
-          <a:xfrm>
-            <a:off x="406301" y="1254323"/>
-            <a:ext cx="8498026" cy="639812"/>
-          </a:xfrm>
-          <a:prstGeom prst="rect">
-            <a:avLst/>
-          </a:prstGeom>
-          <a:noFill/>
-          <a:ln/>
-        </p:spPr>
-        <p:txBody>
-          <a:bodyPr wrap="square" lIns="0" tIns="0" rIns="0" bIns="0" rtlCol="0" anchor="t"/>
-          <a:lstStyle/>
-          <a:p>
-            <a:pPr algn="l" indent="0" marL="0">
-              <a:lnSpc>
-                <a:spcPts val="1680"/>
-              </a:lnSpc>
-              <a:spcBef>
-                <a:spcPts val="300"/>
-              </a:spcBef>
-              <a:spcAft>
-                <a:spcPts val="300"/>
-              </a:spcAft>
-              <a:buNone/>
-            </a:pPr>
-            <a:r>
-              <a:rPr lang="en-US" sz="1200" dirty="0">
-                <a:solidFill>
-                  <a:srgbClr val="1A1A1A"/>
-                </a:solidFill>
-                <a:latin typeface="Georgia" pitchFamily="34" charset="0"/>
-                <a:ea typeface="Georgia" pitchFamily="34" charset="-122"/>
-                <a:cs typeface="Georgia" pitchFamily="34" charset="-120"/>
-              </a:rPr>
-              <a:t>&gt; </a:t>
-            </a:r>
-            <a:pPr algn="l" indent="0" marL="0">
-              <a:lnSpc>
-                <a:spcPts val="1680"/>
-              </a:lnSpc>
-              <a:spcBef>
-                <a:spcPts val="300"/>
-              </a:spcBef>
-              <a:spcAft>
-                <a:spcPts val="300"/>
-              </a:spcAft>
-              <a:buNone/>
-            </a:pPr>
-            <a:r>
-              <a:rPr lang="en-US" sz="1200" i="1" dirty="0">
-                <a:solidFill>
-                  <a:srgbClr val="1A1A1A"/>
-                </a:solidFill>
-                <a:latin typeface="Georgia" pitchFamily="34" charset="0"/>
-                <a:ea typeface="Georgia" pitchFamily="34" charset="-122"/>
-                <a:cs typeface="Georgia" pitchFamily="34" charset="-120"/>
-              </a:rPr>
-              <a:t>yama-niyamāsana-prāṇāyāma-pratyāhāra-dhāraṇā-dhyāna-samādhayo 'ṣṭāv aṅgāni</a:t>
-            </a:r>
-            <a:pPr algn="l" indent="0" marL="0">
-              <a:lnSpc>
-                <a:spcPts val="1680"/>
-              </a:lnSpc>
-              <a:spcBef>
-                <a:spcPts val="300"/>
-              </a:spcBef>
-              <a:spcAft>
-                <a:spcPts val="300"/>
-              </a:spcAft>
-              <a:buNone/>
-            </a:pPr>
-            <a:r>
-              <a:rPr lang="en-US" sz="1200" dirty="0">
-                <a:solidFill>
-                  <a:srgbClr val="1A1A1A"/>
-                </a:solidFill>
-                <a:latin typeface="Georgia" pitchFamily="34" charset="0"/>
-                <a:ea typeface="Georgia" pitchFamily="34" charset="-122"/>
-                <a:cs typeface="Georgia" pitchFamily="34" charset="-120"/>
-              </a:rPr>
-              <a:t> &gt; "Restraints, observances, posture, breath regulation, sense-withdrawal, focused attention, sustained meditation, absorption — these are the eight limbs."</a:t>
-            </a:r>
-            <a:endParaRPr lang="en-US" sz="1200" dirty="0"/>
-          </a:p>
-        </p:txBody>
-      </p:sp>
-      <p:sp>
-        <p:nvSpPr>
-          <p:cNvPr id="6" name="Text 4"/>
-          <p:cNvSpPr/>
-          <p:nvPr/>
-        </p:nvSpPr>
-        <p:spPr>
-          <a:xfrm>
-            <a:off x="634901" y="1982986"/>
-            <a:ext cx="8102798" cy="281880"/>
-          </a:xfrm>
-          <a:prstGeom prst="rect">
-            <a:avLst/>
-          </a:prstGeom>
-          <a:noFill/>
-          <a:ln/>
-        </p:spPr>
-        <p:txBody>
-          <a:bodyPr wrap="square" lIns="0" tIns="0" rIns="0" bIns="0" rtlCol="0" anchor="t"/>
-          <a:lstStyle/>
-          <a:p>
-            <a:pPr algn="l" marL="342900" indent="-342900">
-              <a:lnSpc>
-                <a:spcPts val="1620"/>
-              </a:lnSpc>
-              <a:spcAft>
-                <a:spcPts val="300"/>
-              </a:spcAft>
-              <a:buSzPct val="100000"/>
-              <a:buChar char="•"/>
-            </a:pPr>
-            <a:r>
-              <a:rPr lang="en-US" sz="1200" b="1" dirty="0">
-                <a:solidFill>
-                  <a:srgbClr val="1A1A1A"/>
-                </a:solidFill>
-                <a:latin typeface="Georgia" pitchFamily="34" charset="0"/>
-                <a:ea typeface="Georgia" pitchFamily="34" charset="-122"/>
-                <a:cs typeface="Georgia" pitchFamily="34" charset="-120"/>
-              </a:rPr>
-              <a:t>Walk through each limb with its key sūtra:</a:t>
-            </a:r>
-            <a:endParaRPr lang="en-US" sz="1200" dirty="0"/>
-          </a:p>
-        </p:txBody>
-      </p:sp>
-      <p:sp>
-        <p:nvSpPr>
-          <p:cNvPr id="7" name="Text 5"/>
-          <p:cNvSpPr/>
-          <p:nvPr/>
-        </p:nvSpPr>
-        <p:spPr>
-          <a:xfrm>
-            <a:off x="406301" y="2353717"/>
-            <a:ext cx="8498026" cy="213271"/>
-          </a:xfrm>
-          <a:prstGeom prst="rect">
-            <a:avLst/>
-          </a:prstGeom>
-          <a:noFill/>
-          <a:ln/>
-        </p:spPr>
-        <p:txBody>
-          <a:bodyPr wrap="square" lIns="0" tIns="0" rIns="0" bIns="0" rtlCol="0" anchor="t"/>
-          <a:lstStyle/>
-          <a:p>
-            <a:pPr algn="l" indent="0" marL="0">
-              <a:lnSpc>
-                <a:spcPts val="1680"/>
-              </a:lnSpc>
-              <a:spcBef>
-                <a:spcPts val="300"/>
-              </a:spcBef>
-              <a:spcAft>
-                <a:spcPts val="300"/>
-              </a:spcAft>
-              <a:buNone/>
-            </a:pPr>
-            <a:r>
-              <a:rPr lang="en-US" sz="1200" i="1" dirty="0">
-                <a:solidFill>
-                  <a:srgbClr val="1A1A1A"/>
-                </a:solidFill>
-                <a:latin typeface="Georgia" pitchFamily="34" charset="0"/>
-                <a:ea typeface="Georgia" pitchFamily="34" charset="-122"/>
-                <a:cs typeface="Georgia" pitchFamily="34" charset="-120"/>
-              </a:rPr>
-              <a:t>Each row: # · Limb · Sanskrit gloss · Source verse.</a:t>
-            </a:r>
-            <a:endParaRPr lang="en-US" sz="1200" dirty="0"/>
-          </a:p>
-        </p:txBody>
-      </p:sp>
-      <p:sp>
-        <p:nvSpPr>
-          <p:cNvPr id="8" name="Text 6"/>
-          <p:cNvSpPr/>
-          <p:nvPr/>
-        </p:nvSpPr>
-        <p:spPr>
-          <a:xfrm>
-            <a:off x="634901" y="2655838"/>
-            <a:ext cx="8102798" cy="1988344"/>
-          </a:xfrm>
-          <a:prstGeom prst="rect">
-            <a:avLst/>
-          </a:prstGeom>
-          <a:noFill/>
-          <a:ln/>
-        </p:spPr>
-        <p:txBody>
-          <a:bodyPr wrap="square" lIns="0" tIns="0" rIns="0" bIns="0" rtlCol="0" anchor="t"/>
-          <a:lstStyle/>
-          <a:p>
-            <a:pPr algn="l" marL="342900" indent="-342900">
-              <a:lnSpc>
-                <a:spcPts val="1620"/>
-              </a:lnSpc>
-              <a:spcAft>
-                <a:spcPts val="300"/>
-              </a:spcAft>
-              <a:buSzPct val="100000"/>
-              <a:buChar char="•"/>
-            </a:pPr>
-            <a:r>
-              <a:rPr lang="en-US" sz="1200" b="1" dirty="0">
-                <a:solidFill>
-                  <a:srgbClr val="1A1A1A"/>
-                </a:solidFill>
-                <a:latin typeface="Georgia" pitchFamily="34" charset="0"/>
-                <a:ea typeface="Georgia" pitchFamily="34" charset="-122"/>
-                <a:cs typeface="Georgia" pitchFamily="34" charset="-120"/>
-              </a:rPr>
-              <a:t>1</a:t>
-            </a:r>
-            <a:pPr algn="l" indent="0" marL="0">
-              <a:lnSpc>
-                <a:spcPts val="1620"/>
-              </a:lnSpc>
-              <a:spcAft>
-                <a:spcPts val="300"/>
-              </a:spcAft>
-              <a:buNone/>
-            </a:pPr>
-            <a:r>
-              <a:rPr lang="en-US" sz="1200" dirty="0">
-                <a:solidFill>
-                  <a:srgbClr val="1A1A1A"/>
-                </a:solidFill>
-                <a:latin typeface="Georgia" pitchFamily="34" charset="0"/>
-                <a:ea typeface="Georgia" pitchFamily="34" charset="-122"/>
-                <a:cs typeface="Georgia" pitchFamily="34" charset="-120"/>
-              </a:rPr>
-              <a:t> — </a:t>
-            </a:r>
-            <a:pPr algn="l" indent="0" marL="0">
-              <a:lnSpc>
-                <a:spcPts val="1620"/>
-              </a:lnSpc>
-              <a:spcAft>
-                <a:spcPts val="300"/>
-              </a:spcAft>
-              <a:buNone/>
-            </a:pPr>
-            <a:r>
-              <a:rPr lang="en-US" sz="1200" i="1" dirty="0">
-                <a:solidFill>
-                  <a:srgbClr val="1A1A1A"/>
-                </a:solidFill>
-                <a:latin typeface="Georgia" pitchFamily="34" charset="0"/>
-                <a:ea typeface="Georgia" pitchFamily="34" charset="-122"/>
-                <a:cs typeface="Georgia" pitchFamily="34" charset="-120"/>
-              </a:rPr>
-              <a:t>yama</a:t>
-            </a:r>
-            <a:pPr algn="l" indent="0" marL="0">
-              <a:lnSpc>
-                <a:spcPts val="1620"/>
-              </a:lnSpc>
-              <a:spcAft>
-                <a:spcPts val="300"/>
-              </a:spcAft>
-              <a:buNone/>
-            </a:pPr>
-            <a:r>
-              <a:rPr lang="en-US" sz="1200" dirty="0">
-                <a:solidFill>
-                  <a:srgbClr val="1A1A1A"/>
-                </a:solidFill>
-                <a:latin typeface="Georgia" pitchFamily="34" charset="0"/>
-                <a:ea typeface="Georgia" pitchFamily="34" charset="-122"/>
-                <a:cs typeface="Georgia" pitchFamily="34" charset="-120"/>
-              </a:rPr>
-              <a:t> · restraints (ahiṁsā, satya, asteya, brahmacarya, aparigraha) · YS 2.30</a:t>
-            </a:r>
-            <a:endParaRPr lang="en-US" sz="1200" dirty="0"/>
-          </a:p>
-          <a:p>
-            <a:pPr algn="l" marL="342900" indent="-342900">
-              <a:lnSpc>
-                <a:spcPts val="1620"/>
-              </a:lnSpc>
-              <a:spcAft>
-                <a:spcPts val="300"/>
-              </a:spcAft>
-              <a:buSzPct val="100000"/>
-              <a:buChar char="•"/>
-            </a:pPr>
-            <a:r>
-              <a:rPr lang="en-US" sz="1200" b="1" dirty="0">
-                <a:solidFill>
-                  <a:srgbClr val="1A1A1A"/>
-                </a:solidFill>
-                <a:latin typeface="Georgia" pitchFamily="34" charset="0"/>
-                <a:ea typeface="Georgia" pitchFamily="34" charset="-122"/>
-                <a:cs typeface="Georgia" pitchFamily="34" charset="-120"/>
-              </a:rPr>
-              <a:t>2</a:t>
-            </a:r>
-            <a:pPr algn="l" indent="0" marL="0">
-              <a:lnSpc>
-                <a:spcPts val="1620"/>
-              </a:lnSpc>
-              <a:spcAft>
-                <a:spcPts val="300"/>
-              </a:spcAft>
-              <a:buNone/>
-            </a:pPr>
-            <a:r>
-              <a:rPr lang="en-US" sz="1200" dirty="0">
-                <a:solidFill>
-                  <a:srgbClr val="1A1A1A"/>
-                </a:solidFill>
-                <a:latin typeface="Georgia" pitchFamily="34" charset="0"/>
-                <a:ea typeface="Georgia" pitchFamily="34" charset="-122"/>
-                <a:cs typeface="Georgia" pitchFamily="34" charset="-120"/>
-              </a:rPr>
-              <a:t> — </a:t>
-            </a:r>
-            <a:pPr algn="l" indent="0" marL="0">
-              <a:lnSpc>
-                <a:spcPts val="1620"/>
-              </a:lnSpc>
-              <a:spcAft>
-                <a:spcPts val="300"/>
-              </a:spcAft>
-              <a:buNone/>
-            </a:pPr>
-            <a:r>
-              <a:rPr lang="en-US" sz="1200" i="1" dirty="0">
-                <a:solidFill>
-                  <a:srgbClr val="1A1A1A"/>
-                </a:solidFill>
-                <a:latin typeface="Georgia" pitchFamily="34" charset="0"/>
-                <a:ea typeface="Georgia" pitchFamily="34" charset="-122"/>
-                <a:cs typeface="Georgia" pitchFamily="34" charset="-120"/>
-              </a:rPr>
-              <a:t>niyama</a:t>
-            </a:r>
-            <a:pPr algn="l" indent="0" marL="0">
-              <a:lnSpc>
-                <a:spcPts val="1620"/>
-              </a:lnSpc>
-              <a:spcAft>
-                <a:spcPts val="300"/>
-              </a:spcAft>
-              <a:buNone/>
-            </a:pPr>
-            <a:r>
-              <a:rPr lang="en-US" sz="1200" dirty="0">
-                <a:solidFill>
-                  <a:srgbClr val="1A1A1A"/>
-                </a:solidFill>
-                <a:latin typeface="Georgia" pitchFamily="34" charset="0"/>
-                <a:ea typeface="Georgia" pitchFamily="34" charset="-122"/>
-                <a:cs typeface="Georgia" pitchFamily="34" charset="-120"/>
-              </a:rPr>
-              <a:t> · observances (śauca, santoṣa, tapas, svādhyāya, īśvara-praṇidhāna) · YS 2.32</a:t>
-            </a:r>
-            <a:endParaRPr lang="en-US" sz="1200" dirty="0"/>
-          </a:p>
-          <a:p>
-            <a:pPr algn="l" marL="342900" indent="-342900">
-              <a:lnSpc>
-                <a:spcPts val="1620"/>
-              </a:lnSpc>
-              <a:spcAft>
-                <a:spcPts val="300"/>
-              </a:spcAft>
-              <a:buSzPct val="100000"/>
-              <a:buChar char="•"/>
-            </a:pPr>
-            <a:r>
-              <a:rPr lang="en-US" sz="1200" b="1" dirty="0">
-                <a:solidFill>
-                  <a:srgbClr val="1A1A1A"/>
-                </a:solidFill>
-                <a:latin typeface="Georgia" pitchFamily="34" charset="0"/>
-                <a:ea typeface="Georgia" pitchFamily="34" charset="-122"/>
-                <a:cs typeface="Georgia" pitchFamily="34" charset="-120"/>
-              </a:rPr>
-              <a:t>3</a:t>
-            </a:r>
-            <a:pPr algn="l" indent="0" marL="0">
-              <a:lnSpc>
-                <a:spcPts val="1620"/>
-              </a:lnSpc>
-              <a:spcAft>
-                <a:spcPts val="300"/>
-              </a:spcAft>
-              <a:buNone/>
-            </a:pPr>
-            <a:r>
-              <a:rPr lang="en-US" sz="1200" dirty="0">
-                <a:solidFill>
-                  <a:srgbClr val="1A1A1A"/>
-                </a:solidFill>
-                <a:latin typeface="Georgia" pitchFamily="34" charset="0"/>
-                <a:ea typeface="Georgia" pitchFamily="34" charset="-122"/>
-                <a:cs typeface="Georgia" pitchFamily="34" charset="-120"/>
-              </a:rPr>
-              <a:t> — </a:t>
-            </a:r>
-            <a:pPr algn="l" indent="0" marL="0">
-              <a:lnSpc>
-                <a:spcPts val="1620"/>
-              </a:lnSpc>
-              <a:spcAft>
-                <a:spcPts val="300"/>
-              </a:spcAft>
-              <a:buNone/>
-            </a:pPr>
-            <a:r>
-              <a:rPr lang="en-US" sz="1200" i="1" dirty="0">
-                <a:solidFill>
-                  <a:srgbClr val="1A1A1A"/>
-                </a:solidFill>
-                <a:latin typeface="Georgia" pitchFamily="34" charset="0"/>
-                <a:ea typeface="Georgia" pitchFamily="34" charset="-122"/>
-                <a:cs typeface="Georgia" pitchFamily="34" charset="-120"/>
-              </a:rPr>
-              <a:t>āsana</a:t>
-            </a:r>
-            <a:pPr algn="l" indent="0" marL="0">
-              <a:lnSpc>
-                <a:spcPts val="1620"/>
-              </a:lnSpc>
-              <a:spcAft>
-                <a:spcPts val="300"/>
-              </a:spcAft>
-              <a:buNone/>
-            </a:pPr>
-            <a:r>
-              <a:rPr lang="en-US" sz="1200" dirty="0">
-                <a:solidFill>
-                  <a:srgbClr val="1A1A1A"/>
-                </a:solidFill>
-                <a:latin typeface="Georgia" pitchFamily="34" charset="0"/>
-                <a:ea typeface="Georgia" pitchFamily="34" charset="-122"/>
-                <a:cs typeface="Georgia" pitchFamily="34" charset="-120"/>
-              </a:rPr>
-              <a:t> · "sthira-sukham" — steady and comfortable · YS 2.46</a:t>
-            </a:r>
-            <a:endParaRPr lang="en-US" sz="1200" dirty="0"/>
-          </a:p>
-          <a:p>
-            <a:pPr algn="l" marL="342900" indent="-342900">
-              <a:lnSpc>
-                <a:spcPts val="1620"/>
-              </a:lnSpc>
-              <a:spcAft>
-                <a:spcPts val="300"/>
-              </a:spcAft>
-              <a:buSzPct val="100000"/>
-              <a:buChar char="•"/>
-            </a:pPr>
-            <a:r>
-              <a:rPr lang="en-US" sz="1200" b="1" dirty="0">
-                <a:solidFill>
-                  <a:srgbClr val="1A1A1A"/>
-                </a:solidFill>
-                <a:latin typeface="Georgia" pitchFamily="34" charset="0"/>
-                <a:ea typeface="Georgia" pitchFamily="34" charset="-122"/>
-                <a:cs typeface="Georgia" pitchFamily="34" charset="-120"/>
-              </a:rPr>
-              <a:t>4</a:t>
-            </a:r>
-            <a:pPr algn="l" indent="0" marL="0">
-              <a:lnSpc>
-                <a:spcPts val="1620"/>
-              </a:lnSpc>
-              <a:spcAft>
-                <a:spcPts val="300"/>
-              </a:spcAft>
-              <a:buNone/>
-            </a:pPr>
-            <a:r>
-              <a:rPr lang="en-US" sz="1200" dirty="0">
-                <a:solidFill>
-                  <a:srgbClr val="1A1A1A"/>
-                </a:solidFill>
-                <a:latin typeface="Georgia" pitchFamily="34" charset="0"/>
-                <a:ea typeface="Georgia" pitchFamily="34" charset="-122"/>
-                <a:cs typeface="Georgia" pitchFamily="34" charset="-120"/>
-              </a:rPr>
-              <a:t> — </a:t>
-            </a:r>
-            <a:pPr algn="l" indent="0" marL="0">
-              <a:lnSpc>
-                <a:spcPts val="1620"/>
-              </a:lnSpc>
-              <a:spcAft>
-                <a:spcPts val="300"/>
-              </a:spcAft>
-              <a:buNone/>
-            </a:pPr>
-            <a:r>
-              <a:rPr lang="en-US" sz="1200" i="1" dirty="0">
-                <a:solidFill>
-                  <a:srgbClr val="1A1A1A"/>
-                </a:solidFill>
-                <a:latin typeface="Georgia" pitchFamily="34" charset="0"/>
-                <a:ea typeface="Georgia" pitchFamily="34" charset="-122"/>
-                <a:cs typeface="Georgia" pitchFamily="34" charset="-120"/>
-              </a:rPr>
-              <a:t>prāṇāyāma</a:t>
-            </a:r>
-            <a:pPr algn="l" indent="0" marL="0">
-              <a:lnSpc>
-                <a:spcPts val="1620"/>
-              </a:lnSpc>
-              <a:spcAft>
-                <a:spcPts val="300"/>
-              </a:spcAft>
-              <a:buNone/>
-            </a:pPr>
-            <a:r>
-              <a:rPr lang="en-US" sz="1200" dirty="0">
-                <a:solidFill>
-                  <a:srgbClr val="1A1A1A"/>
-                </a:solidFill>
-                <a:latin typeface="Georgia" pitchFamily="34" charset="0"/>
-                <a:ea typeface="Georgia" pitchFamily="34" charset="-122"/>
-                <a:cs typeface="Georgia" pitchFamily="34" charset="-120"/>
-              </a:rPr>
-              <a:t> · breath regulation; cessation of gati · YS 2.49</a:t>
-            </a:r>
-            <a:endParaRPr lang="en-US" sz="1200" dirty="0"/>
-          </a:p>
-          <a:p>
-            <a:pPr algn="l" marL="342900" indent="-342900">
-              <a:lnSpc>
-                <a:spcPts val="1620"/>
-              </a:lnSpc>
-              <a:spcAft>
-                <a:spcPts val="300"/>
-              </a:spcAft>
-              <a:buSzPct val="100000"/>
-              <a:buChar char="•"/>
-            </a:pPr>
-            <a:r>
-              <a:rPr lang="en-US" sz="1200" b="1" dirty="0">
-                <a:solidFill>
-                  <a:srgbClr val="1A1A1A"/>
-                </a:solidFill>
-                <a:latin typeface="Georgia" pitchFamily="34" charset="0"/>
-                <a:ea typeface="Georgia" pitchFamily="34" charset="-122"/>
-                <a:cs typeface="Georgia" pitchFamily="34" charset="-120"/>
-              </a:rPr>
-              <a:t>5</a:t>
-            </a:r>
-            <a:pPr algn="l" indent="0" marL="0">
-              <a:lnSpc>
-                <a:spcPts val="1620"/>
-              </a:lnSpc>
-              <a:spcAft>
-                <a:spcPts val="300"/>
-              </a:spcAft>
-              <a:buNone/>
-            </a:pPr>
-            <a:r>
-              <a:rPr lang="en-US" sz="1200" dirty="0">
-                <a:solidFill>
-                  <a:srgbClr val="1A1A1A"/>
-                </a:solidFill>
-                <a:latin typeface="Georgia" pitchFamily="34" charset="0"/>
-                <a:ea typeface="Georgia" pitchFamily="34" charset="-122"/>
-                <a:cs typeface="Georgia" pitchFamily="34" charset="-120"/>
-              </a:rPr>
-              <a:t> — </a:t>
-            </a:r>
-            <a:pPr algn="l" indent="0" marL="0">
-              <a:lnSpc>
-                <a:spcPts val="1620"/>
-              </a:lnSpc>
-              <a:spcAft>
-                <a:spcPts val="300"/>
-              </a:spcAft>
-              <a:buNone/>
-            </a:pPr>
-            <a:r>
-              <a:rPr lang="en-US" sz="1200" i="1" dirty="0">
-                <a:solidFill>
-                  <a:srgbClr val="1A1A1A"/>
-                </a:solidFill>
-                <a:latin typeface="Georgia" pitchFamily="34" charset="0"/>
-                <a:ea typeface="Georgia" pitchFamily="34" charset="-122"/>
-                <a:cs typeface="Georgia" pitchFamily="34" charset="-120"/>
-              </a:rPr>
-              <a:t>pratyāhāra</a:t>
-            </a:r>
-            <a:pPr algn="l" indent="0" marL="0">
-              <a:lnSpc>
-                <a:spcPts val="1620"/>
-              </a:lnSpc>
-              <a:spcAft>
-                <a:spcPts val="300"/>
-              </a:spcAft>
-              <a:buNone/>
-            </a:pPr>
-            <a:r>
-              <a:rPr lang="en-US" sz="1200" dirty="0">
-                <a:solidFill>
-                  <a:srgbClr val="1A1A1A"/>
-                </a:solidFill>
-                <a:latin typeface="Georgia" pitchFamily="34" charset="0"/>
-                <a:ea typeface="Georgia" pitchFamily="34" charset="-122"/>
-                <a:cs typeface="Georgia" pitchFamily="34" charset="-120"/>
-              </a:rPr>
-              <a:t> · sense-withdrawal · YS 2.54</a:t>
-            </a:r>
-            <a:endParaRPr lang="en-US" sz="1200" dirty="0"/>
-          </a:p>
-          <a:p>
-            <a:pPr algn="l" marL="342900" indent="-342900">
-              <a:lnSpc>
-                <a:spcPts val="1620"/>
-              </a:lnSpc>
-              <a:spcAft>
-                <a:spcPts val="300"/>
-              </a:spcAft>
-              <a:buSzPct val="100000"/>
-              <a:buChar char="•"/>
-            </a:pPr>
-            <a:r>
-              <a:rPr lang="en-US" sz="1200" b="1" dirty="0">
-                <a:solidFill>
-                  <a:srgbClr val="1A1A1A"/>
-                </a:solidFill>
-                <a:latin typeface="Georgia" pitchFamily="34" charset="0"/>
-                <a:ea typeface="Georgia" pitchFamily="34" charset="-122"/>
-                <a:cs typeface="Georgia" pitchFamily="34" charset="-120"/>
-              </a:rPr>
-              <a:t>6</a:t>
-            </a:r>
-            <a:pPr algn="l" indent="0" marL="0">
-              <a:lnSpc>
-                <a:spcPts val="1620"/>
-              </a:lnSpc>
-              <a:spcAft>
-                <a:spcPts val="300"/>
-              </a:spcAft>
-              <a:buNone/>
-            </a:pPr>
-            <a:r>
-              <a:rPr lang="en-US" sz="1200" dirty="0">
-                <a:solidFill>
-                  <a:srgbClr val="1A1A1A"/>
-                </a:solidFill>
-                <a:latin typeface="Georgia" pitchFamily="34" charset="0"/>
-                <a:ea typeface="Georgia" pitchFamily="34" charset="-122"/>
-                <a:cs typeface="Georgia" pitchFamily="34" charset="-120"/>
-              </a:rPr>
-              <a:t> — </a:t>
-            </a:r>
-            <a:pPr algn="l" indent="0" marL="0">
-              <a:lnSpc>
-                <a:spcPts val="1620"/>
-              </a:lnSpc>
-              <a:spcAft>
-                <a:spcPts val="300"/>
-              </a:spcAft>
-              <a:buNone/>
-            </a:pPr>
-            <a:r>
-              <a:rPr lang="en-US" sz="1200" i="1" dirty="0">
-                <a:solidFill>
-                  <a:srgbClr val="1A1A1A"/>
-                </a:solidFill>
-                <a:latin typeface="Georgia" pitchFamily="34" charset="0"/>
-                <a:ea typeface="Georgia" pitchFamily="34" charset="-122"/>
-                <a:cs typeface="Georgia" pitchFamily="34" charset="-120"/>
-              </a:rPr>
-              <a:t>dhāraṇā</a:t>
-            </a:r>
-            <a:pPr algn="l" indent="0" marL="0">
-              <a:lnSpc>
-                <a:spcPts val="1620"/>
-              </a:lnSpc>
-              <a:spcAft>
-                <a:spcPts val="300"/>
-              </a:spcAft>
-              <a:buNone/>
-            </a:pPr>
-            <a:r>
-              <a:rPr lang="en-US" sz="1200" dirty="0">
-                <a:solidFill>
-                  <a:srgbClr val="1A1A1A"/>
-                </a:solidFill>
-                <a:latin typeface="Georgia" pitchFamily="34" charset="0"/>
-                <a:ea typeface="Georgia" pitchFamily="34" charset="-122"/>
-                <a:cs typeface="Georgia" pitchFamily="34" charset="-120"/>
-              </a:rPr>
-              <a:t> · focused attention · YS 3.1</a:t>
-            </a:r>
-            <a:endParaRPr lang="en-US" sz="1200" dirty="0"/>
-          </a:p>
-          <a:p>
-            <a:pPr algn="l" marL="342900" indent="-342900">
-              <a:lnSpc>
-                <a:spcPts val="1620"/>
-              </a:lnSpc>
-              <a:spcAft>
-                <a:spcPts val="300"/>
-              </a:spcAft>
-              <a:buSzPct val="100000"/>
-              <a:buChar char="•"/>
-            </a:pPr>
-            <a:r>
-              <a:rPr lang="en-US" sz="1200" b="1" dirty="0">
-                <a:solidFill>
-                  <a:srgbClr val="1A1A1A"/>
-                </a:solidFill>
-                <a:latin typeface="Georgia" pitchFamily="34" charset="0"/>
-                <a:ea typeface="Georgia" pitchFamily="34" charset="-122"/>
-                <a:cs typeface="Georgia" pitchFamily="34" charset="-120"/>
-              </a:rPr>
-              <a:t>7</a:t>
-            </a:r>
-            <a:pPr algn="l" indent="0" marL="0">
-              <a:lnSpc>
-                <a:spcPts val="1620"/>
-              </a:lnSpc>
-              <a:spcAft>
-                <a:spcPts val="300"/>
-              </a:spcAft>
-              <a:buNone/>
-            </a:pPr>
-            <a:r>
-              <a:rPr lang="en-US" sz="1200" dirty="0">
-                <a:solidFill>
-                  <a:srgbClr val="1A1A1A"/>
-                </a:solidFill>
-                <a:latin typeface="Georgia" pitchFamily="34" charset="0"/>
-                <a:ea typeface="Georgia" pitchFamily="34" charset="-122"/>
-                <a:cs typeface="Georgia" pitchFamily="34" charset="-120"/>
-              </a:rPr>
-              <a:t> — </a:t>
-            </a:r>
-            <a:pPr algn="l" indent="0" marL="0">
-              <a:lnSpc>
-                <a:spcPts val="1620"/>
-              </a:lnSpc>
-              <a:spcAft>
-                <a:spcPts val="300"/>
-              </a:spcAft>
-              <a:buNone/>
-            </a:pPr>
-            <a:r>
-              <a:rPr lang="en-US" sz="1200" i="1" dirty="0">
-                <a:solidFill>
-                  <a:srgbClr val="1A1A1A"/>
-                </a:solidFill>
-                <a:latin typeface="Georgia" pitchFamily="34" charset="0"/>
-                <a:ea typeface="Georgia" pitchFamily="34" charset="-122"/>
-                <a:cs typeface="Georgia" pitchFamily="34" charset="-120"/>
-              </a:rPr>
-              <a:t>dhyāna</a:t>
-            </a:r>
-            <a:pPr algn="l" indent="0" marL="0">
-              <a:lnSpc>
-                <a:spcPts val="1620"/>
-              </a:lnSpc>
-              <a:spcAft>
-                <a:spcPts val="300"/>
-              </a:spcAft>
-              <a:buNone/>
-            </a:pPr>
-            <a:r>
-              <a:rPr lang="en-US" sz="1200" dirty="0">
-                <a:solidFill>
-                  <a:srgbClr val="1A1A1A"/>
-                </a:solidFill>
-                <a:latin typeface="Georgia" pitchFamily="34" charset="0"/>
-                <a:ea typeface="Georgia" pitchFamily="34" charset="-122"/>
-                <a:cs typeface="Georgia" pitchFamily="34" charset="-120"/>
-              </a:rPr>
-              <a:t> · sustained meditation · YS 3.2</a:t>
-            </a:r>
-            <a:endParaRPr lang="en-US" sz="1200" dirty="0"/>
-          </a:p>
-          <a:p>
-            <a:pPr algn="l" marL="342900" indent="-342900">
-              <a:lnSpc>
-                <a:spcPts val="1620"/>
-              </a:lnSpc>
-              <a:spcAft>
-                <a:spcPts val="300"/>
-              </a:spcAft>
-              <a:buSzPct val="100000"/>
-              <a:buChar char="•"/>
-            </a:pPr>
-            <a:r>
-              <a:rPr lang="en-US" sz="1200" b="1" dirty="0">
-                <a:solidFill>
-                  <a:srgbClr val="1A1A1A"/>
-                </a:solidFill>
-                <a:latin typeface="Georgia" pitchFamily="34" charset="0"/>
-                <a:ea typeface="Georgia" pitchFamily="34" charset="-122"/>
-                <a:cs typeface="Georgia" pitchFamily="34" charset="-120"/>
-              </a:rPr>
-              <a:t>8</a:t>
-            </a:r>
-            <a:pPr algn="l" indent="0" marL="0">
-              <a:lnSpc>
-                <a:spcPts val="1620"/>
-              </a:lnSpc>
-              <a:spcAft>
-                <a:spcPts val="300"/>
-              </a:spcAft>
-              <a:buNone/>
-            </a:pPr>
-            <a:r>
-              <a:rPr lang="en-US" sz="1200" dirty="0">
-                <a:solidFill>
-                  <a:srgbClr val="1A1A1A"/>
-                </a:solidFill>
-                <a:latin typeface="Georgia" pitchFamily="34" charset="0"/>
-                <a:ea typeface="Georgia" pitchFamily="34" charset="-122"/>
-                <a:cs typeface="Georgia" pitchFamily="34" charset="-120"/>
-              </a:rPr>
-              <a:t> — </a:t>
-            </a:r>
-            <a:pPr algn="l" indent="0" marL="0">
-              <a:lnSpc>
-                <a:spcPts val="1620"/>
-              </a:lnSpc>
-              <a:spcAft>
-                <a:spcPts val="300"/>
-              </a:spcAft>
-              <a:buNone/>
-            </a:pPr>
-            <a:r>
-              <a:rPr lang="en-US" sz="1200" i="1" dirty="0">
-                <a:solidFill>
-                  <a:srgbClr val="1A1A1A"/>
-                </a:solidFill>
-                <a:latin typeface="Georgia" pitchFamily="34" charset="0"/>
-                <a:ea typeface="Georgia" pitchFamily="34" charset="-122"/>
-                <a:cs typeface="Georgia" pitchFamily="34" charset="-120"/>
-              </a:rPr>
-              <a:t>samādhi</a:t>
-            </a:r>
-            <a:pPr algn="l" indent="0" marL="0">
-              <a:lnSpc>
-                <a:spcPts val="1620"/>
-              </a:lnSpc>
-              <a:spcAft>
-                <a:spcPts val="300"/>
-              </a:spcAft>
-              <a:buNone/>
-            </a:pPr>
-            <a:r>
-              <a:rPr lang="en-US" sz="1200" dirty="0">
-                <a:solidFill>
-                  <a:srgbClr val="1A1A1A"/>
-                </a:solidFill>
-                <a:latin typeface="Georgia" pitchFamily="34" charset="0"/>
-                <a:ea typeface="Georgia" pitchFamily="34" charset="-122"/>
-                <a:cs typeface="Georgia" pitchFamily="34" charset="-120"/>
-              </a:rPr>
-              <a:t> · absorption · YS 3.3</a:t>
-            </a:r>
-            <a:endParaRPr lang="en-US" sz="1200" dirty="0"/>
-          </a:p>
-        </p:txBody>
-      </p:sp>
-      <p:sp>
-        <p:nvSpPr>
-          <p:cNvPr id="9" name="Text 7"/>
-          <p:cNvSpPr/>
-          <p:nvPr/>
-        </p:nvSpPr>
-        <p:spPr>
-          <a:xfrm>
-            <a:off x="634901" y="4745682"/>
-            <a:ext cx="8102798" cy="281880"/>
-          </a:xfrm>
-          <a:prstGeom prst="rect">
-            <a:avLst/>
-          </a:prstGeom>
-          <a:noFill/>
-          <a:ln/>
-        </p:spPr>
-        <p:txBody>
-          <a:bodyPr wrap="square" lIns="0" tIns="0" rIns="0" bIns="0" rtlCol="0" anchor="t"/>
-          <a:lstStyle/>
-          <a:p>
-            <a:pPr algn="l" marL="342900" indent="-342900">
-              <a:lnSpc>
-                <a:spcPts val="1620"/>
-              </a:lnSpc>
-              <a:spcAft>
-                <a:spcPts val="300"/>
-              </a:spcAft>
-              <a:buSzPct val="100000"/>
-              <a:buChar char="•"/>
-            </a:pPr>
-            <a:r>
-              <a:rPr lang="en-US" sz="1200" b="1" dirty="0">
-                <a:solidFill>
-                  <a:srgbClr val="1A1A1A"/>
-                </a:solidFill>
-                <a:latin typeface="Georgia" pitchFamily="34" charset="0"/>
-                <a:ea typeface="Georgia" pitchFamily="34" charset="-122"/>
-                <a:cs typeface="Georgia" pitchFamily="34" charset="-120"/>
-              </a:rPr>
-              <a:t>Note the proportions.</a:t>
-            </a:r>
-            <a:pPr algn="l" indent="0" marL="0">
-              <a:lnSpc>
-                <a:spcPts val="1620"/>
-              </a:lnSpc>
-              <a:spcAft>
-                <a:spcPts val="300"/>
-              </a:spcAft>
-              <a:buNone/>
-            </a:pPr>
-            <a:r>
-              <a:rPr lang="en-US" sz="1200" dirty="0">
-                <a:solidFill>
-                  <a:srgbClr val="1A1A1A"/>
-                </a:solidFill>
-                <a:latin typeface="Georgia" pitchFamily="34" charset="0"/>
-                <a:ea typeface="Georgia" pitchFamily="34" charset="-122"/>
-                <a:cs typeface="Georgia" pitchFamily="34" charset="-120"/>
-              </a:rPr>
-              <a:t> Patañjali's </a:t>
-            </a:r>
-            <a:pPr algn="l" indent="0" marL="0">
-              <a:lnSpc>
-                <a:spcPts val="1620"/>
-              </a:lnSpc>
-              <a:spcAft>
-                <a:spcPts val="300"/>
-              </a:spcAft>
-              <a:buNone/>
-            </a:pPr>
-            <a:r>
-              <a:rPr lang="en-US" sz="1200" i="1" dirty="0">
-                <a:solidFill>
-                  <a:srgbClr val="1A1A1A"/>
-                </a:solidFill>
-                <a:latin typeface="Georgia" pitchFamily="34" charset="0"/>
-                <a:ea typeface="Georgia" pitchFamily="34" charset="-122"/>
-                <a:cs typeface="Georgia" pitchFamily="34" charset="-120"/>
-              </a:rPr>
-              <a:t>Yoga Sūtras</a:t>
-            </a:r>
-            <a:pPr algn="l" indent="0" marL="0">
-              <a:lnSpc>
-                <a:spcPts val="1620"/>
-              </a:lnSpc>
-              <a:spcAft>
-                <a:spcPts val="300"/>
-              </a:spcAft>
-              <a:buNone/>
-            </a:pPr>
-            <a:r>
-              <a:rPr lang="en-US" sz="1200" dirty="0">
-                <a:solidFill>
-                  <a:srgbClr val="1A1A1A"/>
-                </a:solidFill>
-                <a:latin typeface="Georgia" pitchFamily="34" charset="0"/>
-                <a:ea typeface="Georgia" pitchFamily="34" charset="-122"/>
-                <a:cs typeface="Georgia" pitchFamily="34" charset="-120"/>
-              </a:rPr>
-              <a:t> total ~196 sūtras across 4 chapters. Of these:</a:t>
-            </a:r>
-            <a:endParaRPr lang="en-US" sz="1200" dirty="0"/>
-          </a:p>
-        </p:txBody>
-      </p:sp>
-      <p:sp>
-        <p:nvSpPr>
-          <p:cNvPr id="10" name="Text 8"/>
-          <p:cNvSpPr/>
-          <p:nvPr/>
-        </p:nvSpPr>
-        <p:spPr>
-          <a:xfrm>
-            <a:off x="406301" y="5116413"/>
-            <a:ext cx="8498026" cy="426541"/>
-          </a:xfrm>
-          <a:prstGeom prst="rect">
-            <a:avLst/>
-          </a:prstGeom>
-          <a:noFill/>
-          <a:ln/>
-        </p:spPr>
-        <p:txBody>
-          <a:bodyPr wrap="square" lIns="0" tIns="0" rIns="0" bIns="0" rtlCol="0" anchor="t"/>
-          <a:lstStyle/>
-          <a:p>
-            <a:pPr algn="l" indent="0" marL="0">
-              <a:lnSpc>
-                <a:spcPts val="1680"/>
-              </a:lnSpc>
-              <a:spcBef>
-                <a:spcPts val="300"/>
-              </a:spcBef>
-              <a:spcAft>
-                <a:spcPts val="300"/>
-              </a:spcAft>
-              <a:buNone/>
-            </a:pPr>
-            <a:r>
-              <a:rPr lang="en-US" sz="1200" dirty="0">
-                <a:solidFill>
-                  <a:srgbClr val="1A1A1A"/>
-                </a:solidFill>
-                <a:latin typeface="Georgia" pitchFamily="34" charset="0"/>
-                <a:ea typeface="Georgia" pitchFamily="34" charset="-122"/>
-                <a:cs typeface="Georgia" pitchFamily="34" charset="-120"/>
-              </a:rPr>
-              <a:t>– Ethics + observances (yama, niyama): ~16 sūtras    - Āsana: ~3 sūtras (just YS 2.46–48)    – Prāṇāyāma: ~5 sūtras (YS 2.49–53)    – Pratyāhāra: ~2 sūtras    – Dhāraṇā + dhyāna + samādhi: most of Chapter 3 (~50 sūtras)</a:t>
-            </a:r>
-            <a:endParaRPr lang="en-US" sz="1200" dirty="0"/>
-          </a:p>
-        </p:txBody>
-      </p:sp>
-      <p:sp>
-        <p:nvSpPr>
-          <p:cNvPr id="11" name="Text 9"/>
-          <p:cNvSpPr/>
-          <p:nvPr/>
-        </p:nvSpPr>
-        <p:spPr>
-          <a:xfrm>
-            <a:off x="406301" y="5619155"/>
-            <a:ext cx="8498026" cy="213271"/>
-          </a:xfrm>
-          <a:prstGeom prst="rect">
-            <a:avLst/>
-          </a:prstGeom>
-          <a:noFill/>
-          <a:ln/>
-        </p:spPr>
-        <p:txBody>
-          <a:bodyPr wrap="square" lIns="0" tIns="0" rIns="0" bIns="0" rtlCol="0" anchor="t"/>
-          <a:lstStyle/>
-          <a:p>
-            <a:pPr algn="l" indent="0" marL="0">
-              <a:lnSpc>
-                <a:spcPts val="1680"/>
-              </a:lnSpc>
-              <a:spcBef>
-                <a:spcPts val="300"/>
-              </a:spcBef>
-              <a:spcAft>
-                <a:spcPts val="300"/>
-              </a:spcAft>
-              <a:buNone/>
-            </a:pPr>
-            <a:r>
-              <a:rPr lang="en-US" sz="1200" b="1" dirty="0">
-                <a:solidFill>
-                  <a:srgbClr val="1A1A1A"/>
-                </a:solidFill>
-                <a:latin typeface="Georgia" pitchFamily="34" charset="0"/>
-                <a:ea typeface="Georgia" pitchFamily="34" charset="-122"/>
-                <a:cs typeface="Georgia" pitchFamily="34" charset="-120"/>
-              </a:rPr>
-              <a:t>Modern postural yoga focuses on āsana — to which Patañjali devotes 3 sūtras out of 196.</a:t>
-            </a:r>
-            <a:endParaRPr lang="en-US" sz="1200" dirty="0"/>
-          </a:p>
-        </p:txBody>
-      </p:sp>
-      <p:sp>
-        <p:nvSpPr>
-          <p:cNvPr id="12" name="Text 10"/>
-          <p:cNvSpPr/>
-          <p:nvPr/>
-        </p:nvSpPr>
-        <p:spPr>
-          <a:xfrm>
-            <a:off x="406301" y="5984825"/>
+            <a:off x="406301" y="4434929"/>
             <a:ext cx="8498026" cy="213271"/>
           </a:xfrm>
           <a:prstGeom prst="rect">
@@ -4513,7 +4986,7 @@
                 <a:ea typeface="Times New Roman" pitchFamily="34" charset="-122"/>
                 <a:cs typeface="Times New Roman" pitchFamily="34" charset="-120"/>
               </a:rPr>
-              <a:t>Practice (12 min)</a:t>
+              <a:t>Core (20 min)</a:t>
             </a:r>
             <a:endParaRPr lang="en-US" sz="1800" dirty="0"/>
           </a:p>
@@ -4527,8 +5000,8 @@
         </p:nvSpPr>
         <p:spPr>
           <a:xfrm>
-            <a:off x="406301" y="870942"/>
-            <a:ext cx="8498026" cy="213271"/>
+            <a:off x="634901" y="883593"/>
+            <a:ext cx="8102798" cy="281880"/>
           </a:xfrm>
           <a:prstGeom prst="rect">
             <a:avLst/>
@@ -4540,9 +5013,108 @@
           <a:bodyPr wrap="square" lIns="0" tIns="0" rIns="0" bIns="0" rtlCol="0" anchor="t"/>
           <a:lstStyle/>
           <a:p>
-            <a:pPr algn="l" indent="0" marL="0">
-              <a:lnSpc>
-                <a:spcPts val="1680"/>
+            <a:pPr algn="l" marL="342900" indent="-342900">
+              <a:lnSpc>
+                <a:spcPts val="1620"/>
+              </a:lnSpc>
+              <a:spcAft>
+                <a:spcPts val="300"/>
+              </a:spcAft>
+              <a:buSzPct val="100000"/>
+              <a:buChar char="•"/>
+            </a:pPr>
+            <a:r>
+              <a:rPr lang="en-US" sz="1200" b="1" dirty="0">
+                <a:solidFill>
+                  <a:srgbClr val="1A1A1A"/>
+                </a:solidFill>
+                <a:latin typeface="Georgia" pitchFamily="34" charset="0"/>
+                <a:ea typeface="Georgia" pitchFamily="34" charset="-122"/>
+                <a:cs typeface="Georgia" pitchFamily="34" charset="-120"/>
+              </a:rPr>
+              <a:t>Read YS 2.29:</a:t>
+            </a:r>
+            <a:endParaRPr lang="en-US" sz="1200" dirty="0"/>
+          </a:p>
+        </p:txBody>
+      </p:sp>
+      <p:sp>
+        <p:nvSpPr>
+          <p:cNvPr id="5" name="Text 3"/>
+          <p:cNvSpPr/>
+          <p:nvPr/>
+        </p:nvSpPr>
+        <p:spPr>
+          <a:xfrm>
+            <a:off x="406301" y="1266974"/>
+            <a:ext cx="8331398" cy="1073944"/>
+          </a:xfrm>
+          <a:prstGeom prst="rect">
+            <a:avLst/>
+          </a:prstGeom>
+          <a:solidFill>
+            <a:srgbClr val="FFFFFF"/>
+          </a:solidFill>
+          <a:ln/>
+        </p:spPr>
+        <p:txBody>
+          <a:bodyPr wrap="square" rtlCol="0" anchor="ctr"/>
+          <a:lstStyle/>
+          <a:p>
+            <a:pPr indent="0" marL="0">
+              <a:buNone/>
+            </a:pPr>
+            <a:endParaRPr lang="en-US" dirty="0"/>
+          </a:p>
+        </p:txBody>
+      </p:sp>
+      <p:sp>
+        <p:nvSpPr>
+          <p:cNvPr id="6" name="Shape 4"/>
+          <p:cNvSpPr/>
+          <p:nvPr/>
+        </p:nvSpPr>
+        <p:spPr>
+          <a:xfrm>
+            <a:off x="434876" y="1266974"/>
+            <a:ext cx="0" cy="1073944"/>
+          </a:xfrm>
+          <a:prstGeom prst="line">
+            <a:avLst/>
+          </a:prstGeom>
+          <a:noFill/>
+          <a:ln w="57150">
+            <a:solidFill>
+              <a:srgbClr val="997929"/>
+            </a:solidFill>
+            <a:prstDash val="solid"/>
+          </a:ln>
+        </p:spPr>
+      </p:sp>
+      <p:sp>
+        <p:nvSpPr>
+          <p:cNvPr id="7" name="Text 5"/>
+          <p:cNvSpPr/>
+          <p:nvPr/>
+        </p:nvSpPr>
+        <p:spPr>
+          <a:xfrm>
+            <a:off x="692051" y="1457474"/>
+            <a:ext cx="7973389" cy="692944"/>
+          </a:xfrm>
+          <a:prstGeom prst="rect">
+            <a:avLst/>
+          </a:prstGeom>
+          <a:noFill/>
+          <a:ln/>
+        </p:spPr>
+        <p:txBody>
+          <a:bodyPr wrap="square" lIns="0" tIns="0" rIns="0" bIns="0" rtlCol="0" anchor="t"/>
+          <a:lstStyle/>
+          <a:p>
+            <a:pPr algn="l" indent="0" marL="0">
+              <a:lnSpc>
+                <a:spcPts val="1820"/>
               </a:lnSpc>
               <a:spcBef>
                 <a:spcPts val="300"/>
@@ -4553,15 +5125,84 @@
               <a:buNone/>
             </a:pPr>
             <a:r>
-              <a:rPr lang="en-US" sz="1200" dirty="0">
-                <a:solidFill>
-                  <a:srgbClr val="1A1A1A"/>
-                </a:solidFill>
-                <a:latin typeface="Georgia" pitchFamily="34" charset="0"/>
-                <a:ea typeface="Georgia" pitchFamily="34" charset="-122"/>
-                <a:cs typeface="Georgia" pitchFamily="34" charset="-120"/>
-              </a:rPr>
-              <a:t>– Tāḍāsana → vṛkṣāsana → baddha-koṇāsana → balāsana → sukhāsana.</a:t>
+              <a:rPr lang="en-US" sz="1300" i="1" dirty="0">
+                <a:solidFill>
+                  <a:srgbClr val="1A1A1A"/>
+                </a:solidFill>
+                <a:latin typeface="Times New Roman" pitchFamily="34" charset="0"/>
+                <a:ea typeface="Times New Roman" pitchFamily="34" charset="-122"/>
+                <a:cs typeface="Times New Roman" pitchFamily="34" charset="-120"/>
+              </a:rPr>
+              <a:t>yama-niyamāsana-prāṇāyāma-pratyāhāra-dhāraṇā-dhyāna-samādhayo 'ṣṭāv aṅgāni</a:t>
+            </a:r>
+            <a:pPr algn="l" indent="0" marL="0">
+              <a:lnSpc>
+                <a:spcPts val="1820"/>
+              </a:lnSpc>
+              <a:spcBef>
+                <a:spcPts val="300"/>
+              </a:spcBef>
+              <a:spcAft>
+                <a:spcPts val="300"/>
+              </a:spcAft>
+              <a:buNone/>
+            </a:pPr>
+            <a:r>
+              <a:rPr lang="en-US" sz="1300" dirty="0">
+                <a:solidFill>
+                  <a:srgbClr val="1A1A1A"/>
+                </a:solidFill>
+                <a:latin typeface="Times New Roman" pitchFamily="34" charset="0"/>
+                <a:ea typeface="Times New Roman" pitchFamily="34" charset="-122"/>
+                <a:cs typeface="Times New Roman" pitchFamily="34" charset="-120"/>
+              </a:rPr>
+              <a:t> "Restraints, observances, posture, breath regulation, sense-withdrawal, focused attention, sustained meditation, absorption — these are the eight limbs."</a:t>
+            </a:r>
+            <a:endParaRPr lang="en-US" sz="1300" dirty="0"/>
+          </a:p>
+        </p:txBody>
+      </p:sp>
+      <p:sp>
+        <p:nvSpPr>
+          <p:cNvPr id="8" name="Text 6"/>
+          <p:cNvSpPr/>
+          <p:nvPr/>
+        </p:nvSpPr>
+        <p:spPr>
+          <a:xfrm>
+            <a:off x="634901" y="2442418"/>
+            <a:ext cx="8102798" cy="281880"/>
+          </a:xfrm>
+          <a:prstGeom prst="rect">
+            <a:avLst/>
+          </a:prstGeom>
+          <a:noFill/>
+          <a:ln/>
+        </p:spPr>
+        <p:txBody>
+          <a:bodyPr wrap="square" lIns="0" tIns="0" rIns="0" bIns="0" rtlCol="0" anchor="t"/>
+          <a:lstStyle/>
+          <a:p>
+            <a:pPr algn="l" marL="342900" indent="-342900">
+              <a:lnSpc>
+                <a:spcPts val="1620"/>
+              </a:lnSpc>
+              <a:spcAft>
+                <a:spcPts val="300"/>
+              </a:spcAft>
+              <a:buSzPct val="100000"/>
+              <a:buChar char="•"/>
+            </a:pPr>
+            <a:r>
+              <a:rPr lang="en-US" sz="1200" b="1" dirty="0">
+                <a:solidFill>
+                  <a:srgbClr val="1A1A1A"/>
+                </a:solidFill>
+                <a:latin typeface="Georgia" pitchFamily="34" charset="0"/>
+                <a:ea typeface="Georgia" pitchFamily="34" charset="-122"/>
+                <a:cs typeface="Georgia" pitchFamily="34" charset="-120"/>
+              </a:rPr>
+              <a:t>Walk through each limb with its key sūtra:</a:t>
             </a:r>
             <a:endParaRPr lang="en-US" sz="1200" dirty="0"/>
           </a:p>
@@ -4569,7 +5210,7 @@
       </p:sp>
       <p:sp>
         <p:nvSpPr>
-          <p:cNvPr id="5" name="Text 3"/>
+          <p:cNvPr id="9" name="Text 7"/>
           <p:cNvSpPr/>
           <p:nvPr/>
         </p:nvSpPr>
@@ -4719,7 +5360,7 @@
                 <a:ea typeface="Times New Roman" pitchFamily="34" charset="-122"/>
                 <a:cs typeface="Times New Roman" pitchFamily="34" charset="-120"/>
               </a:rPr>
-              <a:t>Limb quiz (5 min)</a:t>
+              <a:t>Core (20 min) (cont.)</a:t>
             </a:r>
             <a:endParaRPr lang="en-US" sz="1800" dirty="0"/>
           </a:p>
@@ -4759,15 +5400,15 @@
               <a:buNone/>
             </a:pPr>
             <a:r>
-              <a:rPr lang="en-US" sz="1200" dirty="0">
-                <a:solidFill>
-                  <a:srgbClr val="1A1A1A"/>
-                </a:solidFill>
-                <a:latin typeface="Georgia" pitchFamily="34" charset="0"/>
-                <a:ea typeface="Georgia" pitchFamily="34" charset="-122"/>
-                <a:cs typeface="Georgia" pitchFamily="34" charset="-120"/>
-              </a:rPr>
-              <a:t>– 8 marks — name all 8 limbs in Sanskrit with English meaning.</a:t>
+              <a:rPr lang="en-US" sz="1200" i="1" dirty="0">
+                <a:solidFill>
+                  <a:srgbClr val="1A1A1A"/>
+                </a:solidFill>
+                <a:latin typeface="Georgia" pitchFamily="34" charset="0"/>
+                <a:ea typeface="Georgia" pitchFamily="34" charset="-122"/>
+                <a:cs typeface="Georgia" pitchFamily="34" charset="-120"/>
+              </a:rPr>
+              <a:t>Each row: # · Limb · Sanskrit gloss · Source verse.</a:t>
             </a:r>
             <a:endParaRPr lang="en-US" sz="1200" dirty="0"/>
           </a:p>
@@ -4925,7 +5566,7 @@
                 <a:ea typeface="Times New Roman" pitchFamily="34" charset="-122"/>
                 <a:cs typeface="Times New Roman" pitchFamily="34" charset="-120"/>
               </a:rPr>
-              <a:t>Wrap-up (5 min)</a:t>
+              <a:t>Core (20 min) (cont.)</a:t>
             </a:r>
             <a:endParaRPr lang="en-US" sz="1800" dirty="0"/>
           </a:p>
@@ -4939,8 +5580,8 @@
         </p:nvSpPr>
         <p:spPr>
           <a:xfrm>
-            <a:off x="406301" y="870942"/>
-            <a:ext cx="8498026" cy="213271"/>
+            <a:off x="634901" y="883593"/>
+            <a:ext cx="8102798" cy="1988344"/>
           </a:xfrm>
           <a:prstGeom prst="rect">
             <a:avLst/>
@@ -4952,13 +5593,31 @@
           <a:bodyPr wrap="square" lIns="0" tIns="0" rIns="0" bIns="0" rtlCol="0" anchor="t"/>
           <a:lstStyle/>
           <a:p>
-            <a:pPr algn="l" indent="0" marL="0">
-              <a:lnSpc>
-                <a:spcPts val="1680"/>
-              </a:lnSpc>
-              <a:spcBef>
-                <a:spcPts val="300"/>
-              </a:spcBef>
+            <a:pPr algn="l" marL="342900" indent="-342900">
+              <a:lnSpc>
+                <a:spcPts val="1620"/>
+              </a:lnSpc>
+              <a:spcAft>
+                <a:spcPts val="300"/>
+              </a:spcAft>
+              <a:buSzPct val="100000"/>
+              <a:buChar char="•"/>
+            </a:pPr>
+            <a:r>
+              <a:rPr lang="en-US" sz="1200" b="1" dirty="0">
+                <a:solidFill>
+                  <a:srgbClr val="1A1A1A"/>
+                </a:solidFill>
+                <a:latin typeface="Georgia" pitchFamily="34" charset="0"/>
+                <a:ea typeface="Georgia" pitchFamily="34" charset="-122"/>
+                <a:cs typeface="Georgia" pitchFamily="34" charset="-120"/>
+              </a:rPr>
+              <a:t>1</a:t>
+            </a:r>
+            <a:pPr algn="l" indent="0" marL="0">
+              <a:lnSpc>
+                <a:spcPts val="1620"/>
+              </a:lnSpc>
               <a:spcAft>
                 <a:spcPts val="300"/>
               </a:spcAft>
@@ -4973,15 +5632,12 @@
                 <a:ea typeface="Georgia" pitchFamily="34" charset="-122"/>
                 <a:cs typeface="Georgia" pitchFamily="34" charset="-120"/>
               </a:rPr>
-              <a:t>– Preview Day 3: </a:t>
-            </a:r>
-            <a:pPr algn="l" indent="0" marL="0">
-              <a:lnSpc>
-                <a:spcPts val="1680"/>
-              </a:lnSpc>
-              <a:spcBef>
-                <a:spcPts val="300"/>
-              </a:spcBef>
+              <a:t> — </a:t>
+            </a:r>
+            <a:pPr algn="l" indent="0" marL="0">
+              <a:lnSpc>
+                <a:spcPts val="1620"/>
+              </a:lnSpc>
               <a:spcAft>
                 <a:spcPts val="300"/>
               </a:spcAft>
@@ -4996,7 +5652,615 @@
                 <a:ea typeface="Georgia" pitchFamily="34" charset="-122"/>
                 <a:cs typeface="Georgia" pitchFamily="34" charset="-120"/>
               </a:rPr>
-              <a:t>"Tomorrow we read YS 2.46 closely — Patañjali's definition of āsana."</a:t>
+              <a:t>yama</a:t>
+            </a:r>
+            <a:pPr algn="l" indent="0" marL="0">
+              <a:lnSpc>
+                <a:spcPts val="1620"/>
+              </a:lnSpc>
+              <a:spcAft>
+                <a:spcPts val="300"/>
+              </a:spcAft>
+              <a:buNone/>
+            </a:pPr>
+            <a:r>
+              <a:rPr lang="en-US" sz="1200" dirty="0">
+                <a:solidFill>
+                  <a:srgbClr val="1A1A1A"/>
+                </a:solidFill>
+                <a:latin typeface="Georgia" pitchFamily="34" charset="0"/>
+                <a:ea typeface="Georgia" pitchFamily="34" charset="-122"/>
+                <a:cs typeface="Georgia" pitchFamily="34" charset="-120"/>
+              </a:rPr>
+              <a:t> · restraints (ahiṁsā, satya, asteya, brahmacarya, aparigraha) · YS 2.30</a:t>
+            </a:r>
+            <a:endParaRPr lang="en-US" sz="1200" dirty="0"/>
+          </a:p>
+          <a:p>
+            <a:pPr algn="l" marL="342900" indent="-342900">
+              <a:lnSpc>
+                <a:spcPts val="1620"/>
+              </a:lnSpc>
+              <a:spcAft>
+                <a:spcPts val="300"/>
+              </a:spcAft>
+              <a:buSzPct val="100000"/>
+              <a:buChar char="•"/>
+            </a:pPr>
+            <a:r>
+              <a:rPr lang="en-US" sz="1200" b="1" dirty="0">
+                <a:solidFill>
+                  <a:srgbClr val="1A1A1A"/>
+                </a:solidFill>
+                <a:latin typeface="Georgia" pitchFamily="34" charset="0"/>
+                <a:ea typeface="Georgia" pitchFamily="34" charset="-122"/>
+                <a:cs typeface="Georgia" pitchFamily="34" charset="-120"/>
+              </a:rPr>
+              <a:t>2</a:t>
+            </a:r>
+            <a:pPr algn="l" indent="0" marL="0">
+              <a:lnSpc>
+                <a:spcPts val="1620"/>
+              </a:lnSpc>
+              <a:spcAft>
+                <a:spcPts val="300"/>
+              </a:spcAft>
+              <a:buNone/>
+            </a:pPr>
+            <a:r>
+              <a:rPr lang="en-US" sz="1200" dirty="0">
+                <a:solidFill>
+                  <a:srgbClr val="1A1A1A"/>
+                </a:solidFill>
+                <a:latin typeface="Georgia" pitchFamily="34" charset="0"/>
+                <a:ea typeface="Georgia" pitchFamily="34" charset="-122"/>
+                <a:cs typeface="Georgia" pitchFamily="34" charset="-120"/>
+              </a:rPr>
+              <a:t> — </a:t>
+            </a:r>
+            <a:pPr algn="l" indent="0" marL="0">
+              <a:lnSpc>
+                <a:spcPts val="1620"/>
+              </a:lnSpc>
+              <a:spcAft>
+                <a:spcPts val="300"/>
+              </a:spcAft>
+              <a:buNone/>
+            </a:pPr>
+            <a:r>
+              <a:rPr lang="en-US" sz="1200" i="1" dirty="0">
+                <a:solidFill>
+                  <a:srgbClr val="1A1A1A"/>
+                </a:solidFill>
+                <a:latin typeface="Georgia" pitchFamily="34" charset="0"/>
+                <a:ea typeface="Georgia" pitchFamily="34" charset="-122"/>
+                <a:cs typeface="Georgia" pitchFamily="34" charset="-120"/>
+              </a:rPr>
+              <a:t>niyama</a:t>
+            </a:r>
+            <a:pPr algn="l" indent="0" marL="0">
+              <a:lnSpc>
+                <a:spcPts val="1620"/>
+              </a:lnSpc>
+              <a:spcAft>
+                <a:spcPts val="300"/>
+              </a:spcAft>
+              <a:buNone/>
+            </a:pPr>
+            <a:r>
+              <a:rPr lang="en-US" sz="1200" dirty="0">
+                <a:solidFill>
+                  <a:srgbClr val="1A1A1A"/>
+                </a:solidFill>
+                <a:latin typeface="Georgia" pitchFamily="34" charset="0"/>
+                <a:ea typeface="Georgia" pitchFamily="34" charset="-122"/>
+                <a:cs typeface="Georgia" pitchFamily="34" charset="-120"/>
+              </a:rPr>
+              <a:t> · observances (śauca, santoṣa, tapas, svādhyāya, īśvara-praṇidhāna) · YS 2.32</a:t>
+            </a:r>
+            <a:endParaRPr lang="en-US" sz="1200" dirty="0"/>
+          </a:p>
+          <a:p>
+            <a:pPr algn="l" marL="342900" indent="-342900">
+              <a:lnSpc>
+                <a:spcPts val="1620"/>
+              </a:lnSpc>
+              <a:spcAft>
+                <a:spcPts val="300"/>
+              </a:spcAft>
+              <a:buSzPct val="100000"/>
+              <a:buChar char="•"/>
+            </a:pPr>
+            <a:r>
+              <a:rPr lang="en-US" sz="1200" b="1" dirty="0">
+                <a:solidFill>
+                  <a:srgbClr val="1A1A1A"/>
+                </a:solidFill>
+                <a:latin typeface="Georgia" pitchFamily="34" charset="0"/>
+                <a:ea typeface="Georgia" pitchFamily="34" charset="-122"/>
+                <a:cs typeface="Georgia" pitchFamily="34" charset="-120"/>
+              </a:rPr>
+              <a:t>3</a:t>
+            </a:r>
+            <a:pPr algn="l" indent="0" marL="0">
+              <a:lnSpc>
+                <a:spcPts val="1620"/>
+              </a:lnSpc>
+              <a:spcAft>
+                <a:spcPts val="300"/>
+              </a:spcAft>
+              <a:buNone/>
+            </a:pPr>
+            <a:r>
+              <a:rPr lang="en-US" sz="1200" dirty="0">
+                <a:solidFill>
+                  <a:srgbClr val="1A1A1A"/>
+                </a:solidFill>
+                <a:latin typeface="Georgia" pitchFamily="34" charset="0"/>
+                <a:ea typeface="Georgia" pitchFamily="34" charset="-122"/>
+                <a:cs typeface="Georgia" pitchFamily="34" charset="-120"/>
+              </a:rPr>
+              <a:t> — </a:t>
+            </a:r>
+            <a:pPr algn="l" indent="0" marL="0">
+              <a:lnSpc>
+                <a:spcPts val="1620"/>
+              </a:lnSpc>
+              <a:spcAft>
+                <a:spcPts val="300"/>
+              </a:spcAft>
+              <a:buNone/>
+            </a:pPr>
+            <a:r>
+              <a:rPr lang="en-US" sz="1200" i="1" dirty="0">
+                <a:solidFill>
+                  <a:srgbClr val="1A1A1A"/>
+                </a:solidFill>
+                <a:latin typeface="Georgia" pitchFamily="34" charset="0"/>
+                <a:ea typeface="Georgia" pitchFamily="34" charset="-122"/>
+                <a:cs typeface="Georgia" pitchFamily="34" charset="-120"/>
+              </a:rPr>
+              <a:t>āsana</a:t>
+            </a:r>
+            <a:pPr algn="l" indent="0" marL="0">
+              <a:lnSpc>
+                <a:spcPts val="1620"/>
+              </a:lnSpc>
+              <a:spcAft>
+                <a:spcPts val="300"/>
+              </a:spcAft>
+              <a:buNone/>
+            </a:pPr>
+            <a:r>
+              <a:rPr lang="en-US" sz="1200" dirty="0">
+                <a:solidFill>
+                  <a:srgbClr val="1A1A1A"/>
+                </a:solidFill>
+                <a:latin typeface="Georgia" pitchFamily="34" charset="0"/>
+                <a:ea typeface="Georgia" pitchFamily="34" charset="-122"/>
+                <a:cs typeface="Georgia" pitchFamily="34" charset="-120"/>
+              </a:rPr>
+              <a:t> · "sthira-sukham" — steady and comfortable · YS 2.46</a:t>
+            </a:r>
+            <a:endParaRPr lang="en-US" sz="1200" dirty="0"/>
+          </a:p>
+          <a:p>
+            <a:pPr algn="l" marL="342900" indent="-342900">
+              <a:lnSpc>
+                <a:spcPts val="1620"/>
+              </a:lnSpc>
+              <a:spcAft>
+                <a:spcPts val="300"/>
+              </a:spcAft>
+              <a:buSzPct val="100000"/>
+              <a:buChar char="•"/>
+            </a:pPr>
+            <a:r>
+              <a:rPr lang="en-US" sz="1200" b="1" dirty="0">
+                <a:solidFill>
+                  <a:srgbClr val="1A1A1A"/>
+                </a:solidFill>
+                <a:latin typeface="Georgia" pitchFamily="34" charset="0"/>
+                <a:ea typeface="Georgia" pitchFamily="34" charset="-122"/>
+                <a:cs typeface="Georgia" pitchFamily="34" charset="-120"/>
+              </a:rPr>
+              <a:t>4</a:t>
+            </a:r>
+            <a:pPr algn="l" indent="0" marL="0">
+              <a:lnSpc>
+                <a:spcPts val="1620"/>
+              </a:lnSpc>
+              <a:spcAft>
+                <a:spcPts val="300"/>
+              </a:spcAft>
+              <a:buNone/>
+            </a:pPr>
+            <a:r>
+              <a:rPr lang="en-US" sz="1200" dirty="0">
+                <a:solidFill>
+                  <a:srgbClr val="1A1A1A"/>
+                </a:solidFill>
+                <a:latin typeface="Georgia" pitchFamily="34" charset="0"/>
+                <a:ea typeface="Georgia" pitchFamily="34" charset="-122"/>
+                <a:cs typeface="Georgia" pitchFamily="34" charset="-120"/>
+              </a:rPr>
+              <a:t> — </a:t>
+            </a:r>
+            <a:pPr algn="l" indent="0" marL="0">
+              <a:lnSpc>
+                <a:spcPts val="1620"/>
+              </a:lnSpc>
+              <a:spcAft>
+                <a:spcPts val="300"/>
+              </a:spcAft>
+              <a:buNone/>
+            </a:pPr>
+            <a:r>
+              <a:rPr lang="en-US" sz="1200" i="1" dirty="0">
+                <a:solidFill>
+                  <a:srgbClr val="1A1A1A"/>
+                </a:solidFill>
+                <a:latin typeface="Georgia" pitchFamily="34" charset="0"/>
+                <a:ea typeface="Georgia" pitchFamily="34" charset="-122"/>
+                <a:cs typeface="Georgia" pitchFamily="34" charset="-120"/>
+              </a:rPr>
+              <a:t>prāṇāyāma</a:t>
+            </a:r>
+            <a:pPr algn="l" indent="0" marL="0">
+              <a:lnSpc>
+                <a:spcPts val="1620"/>
+              </a:lnSpc>
+              <a:spcAft>
+                <a:spcPts val="300"/>
+              </a:spcAft>
+              <a:buNone/>
+            </a:pPr>
+            <a:r>
+              <a:rPr lang="en-US" sz="1200" dirty="0">
+                <a:solidFill>
+                  <a:srgbClr val="1A1A1A"/>
+                </a:solidFill>
+                <a:latin typeface="Georgia" pitchFamily="34" charset="0"/>
+                <a:ea typeface="Georgia" pitchFamily="34" charset="-122"/>
+                <a:cs typeface="Georgia" pitchFamily="34" charset="-120"/>
+              </a:rPr>
+              <a:t> · breath regulation; cessation of gati · YS 2.49</a:t>
+            </a:r>
+            <a:endParaRPr lang="en-US" sz="1200" dirty="0"/>
+          </a:p>
+          <a:p>
+            <a:pPr algn="l" marL="342900" indent="-342900">
+              <a:lnSpc>
+                <a:spcPts val="1620"/>
+              </a:lnSpc>
+              <a:spcAft>
+                <a:spcPts val="300"/>
+              </a:spcAft>
+              <a:buSzPct val="100000"/>
+              <a:buChar char="•"/>
+            </a:pPr>
+            <a:r>
+              <a:rPr lang="en-US" sz="1200" b="1" dirty="0">
+                <a:solidFill>
+                  <a:srgbClr val="1A1A1A"/>
+                </a:solidFill>
+                <a:latin typeface="Georgia" pitchFamily="34" charset="0"/>
+                <a:ea typeface="Georgia" pitchFamily="34" charset="-122"/>
+                <a:cs typeface="Georgia" pitchFamily="34" charset="-120"/>
+              </a:rPr>
+              <a:t>5</a:t>
+            </a:r>
+            <a:pPr algn="l" indent="0" marL="0">
+              <a:lnSpc>
+                <a:spcPts val="1620"/>
+              </a:lnSpc>
+              <a:spcAft>
+                <a:spcPts val="300"/>
+              </a:spcAft>
+              <a:buNone/>
+            </a:pPr>
+            <a:r>
+              <a:rPr lang="en-US" sz="1200" dirty="0">
+                <a:solidFill>
+                  <a:srgbClr val="1A1A1A"/>
+                </a:solidFill>
+                <a:latin typeface="Georgia" pitchFamily="34" charset="0"/>
+                <a:ea typeface="Georgia" pitchFamily="34" charset="-122"/>
+                <a:cs typeface="Georgia" pitchFamily="34" charset="-120"/>
+              </a:rPr>
+              <a:t> — </a:t>
+            </a:r>
+            <a:pPr algn="l" indent="0" marL="0">
+              <a:lnSpc>
+                <a:spcPts val="1620"/>
+              </a:lnSpc>
+              <a:spcAft>
+                <a:spcPts val="300"/>
+              </a:spcAft>
+              <a:buNone/>
+            </a:pPr>
+            <a:r>
+              <a:rPr lang="en-US" sz="1200" i="1" dirty="0">
+                <a:solidFill>
+                  <a:srgbClr val="1A1A1A"/>
+                </a:solidFill>
+                <a:latin typeface="Georgia" pitchFamily="34" charset="0"/>
+                <a:ea typeface="Georgia" pitchFamily="34" charset="-122"/>
+                <a:cs typeface="Georgia" pitchFamily="34" charset="-120"/>
+              </a:rPr>
+              <a:t>pratyāhāra</a:t>
+            </a:r>
+            <a:pPr algn="l" indent="0" marL="0">
+              <a:lnSpc>
+                <a:spcPts val="1620"/>
+              </a:lnSpc>
+              <a:spcAft>
+                <a:spcPts val="300"/>
+              </a:spcAft>
+              <a:buNone/>
+            </a:pPr>
+            <a:r>
+              <a:rPr lang="en-US" sz="1200" dirty="0">
+                <a:solidFill>
+                  <a:srgbClr val="1A1A1A"/>
+                </a:solidFill>
+                <a:latin typeface="Georgia" pitchFamily="34" charset="0"/>
+                <a:ea typeface="Georgia" pitchFamily="34" charset="-122"/>
+                <a:cs typeface="Georgia" pitchFamily="34" charset="-120"/>
+              </a:rPr>
+              <a:t> · sense-withdrawal · YS 2.54</a:t>
+            </a:r>
+            <a:endParaRPr lang="en-US" sz="1200" dirty="0"/>
+          </a:p>
+          <a:p>
+            <a:pPr algn="l" marL="342900" indent="-342900">
+              <a:lnSpc>
+                <a:spcPts val="1620"/>
+              </a:lnSpc>
+              <a:spcAft>
+                <a:spcPts val="300"/>
+              </a:spcAft>
+              <a:buSzPct val="100000"/>
+              <a:buChar char="•"/>
+            </a:pPr>
+            <a:r>
+              <a:rPr lang="en-US" sz="1200" b="1" dirty="0">
+                <a:solidFill>
+                  <a:srgbClr val="1A1A1A"/>
+                </a:solidFill>
+                <a:latin typeface="Georgia" pitchFamily="34" charset="0"/>
+                <a:ea typeface="Georgia" pitchFamily="34" charset="-122"/>
+                <a:cs typeface="Georgia" pitchFamily="34" charset="-120"/>
+              </a:rPr>
+              <a:t>6</a:t>
+            </a:r>
+            <a:pPr algn="l" indent="0" marL="0">
+              <a:lnSpc>
+                <a:spcPts val="1620"/>
+              </a:lnSpc>
+              <a:spcAft>
+                <a:spcPts val="300"/>
+              </a:spcAft>
+              <a:buNone/>
+            </a:pPr>
+            <a:r>
+              <a:rPr lang="en-US" sz="1200" dirty="0">
+                <a:solidFill>
+                  <a:srgbClr val="1A1A1A"/>
+                </a:solidFill>
+                <a:latin typeface="Georgia" pitchFamily="34" charset="0"/>
+                <a:ea typeface="Georgia" pitchFamily="34" charset="-122"/>
+                <a:cs typeface="Georgia" pitchFamily="34" charset="-120"/>
+              </a:rPr>
+              <a:t> — </a:t>
+            </a:r>
+            <a:pPr algn="l" indent="0" marL="0">
+              <a:lnSpc>
+                <a:spcPts val="1620"/>
+              </a:lnSpc>
+              <a:spcAft>
+                <a:spcPts val="300"/>
+              </a:spcAft>
+              <a:buNone/>
+            </a:pPr>
+            <a:r>
+              <a:rPr lang="en-US" sz="1200" i="1" dirty="0">
+                <a:solidFill>
+                  <a:srgbClr val="1A1A1A"/>
+                </a:solidFill>
+                <a:latin typeface="Georgia" pitchFamily="34" charset="0"/>
+                <a:ea typeface="Georgia" pitchFamily="34" charset="-122"/>
+                <a:cs typeface="Georgia" pitchFamily="34" charset="-120"/>
+              </a:rPr>
+              <a:t>dhāraṇā</a:t>
+            </a:r>
+            <a:pPr algn="l" indent="0" marL="0">
+              <a:lnSpc>
+                <a:spcPts val="1620"/>
+              </a:lnSpc>
+              <a:spcAft>
+                <a:spcPts val="300"/>
+              </a:spcAft>
+              <a:buNone/>
+            </a:pPr>
+            <a:r>
+              <a:rPr lang="en-US" sz="1200" dirty="0">
+                <a:solidFill>
+                  <a:srgbClr val="1A1A1A"/>
+                </a:solidFill>
+                <a:latin typeface="Georgia" pitchFamily="34" charset="0"/>
+                <a:ea typeface="Georgia" pitchFamily="34" charset="-122"/>
+                <a:cs typeface="Georgia" pitchFamily="34" charset="-120"/>
+              </a:rPr>
+              <a:t> · focused attention · YS 3.1</a:t>
+            </a:r>
+            <a:endParaRPr lang="en-US" sz="1200" dirty="0"/>
+          </a:p>
+          <a:p>
+            <a:pPr algn="l" marL="342900" indent="-342900">
+              <a:lnSpc>
+                <a:spcPts val="1620"/>
+              </a:lnSpc>
+              <a:spcAft>
+                <a:spcPts val="300"/>
+              </a:spcAft>
+              <a:buSzPct val="100000"/>
+              <a:buChar char="•"/>
+            </a:pPr>
+            <a:r>
+              <a:rPr lang="en-US" sz="1200" b="1" dirty="0">
+                <a:solidFill>
+                  <a:srgbClr val="1A1A1A"/>
+                </a:solidFill>
+                <a:latin typeface="Georgia" pitchFamily="34" charset="0"/>
+                <a:ea typeface="Georgia" pitchFamily="34" charset="-122"/>
+                <a:cs typeface="Georgia" pitchFamily="34" charset="-120"/>
+              </a:rPr>
+              <a:t>7</a:t>
+            </a:r>
+            <a:pPr algn="l" indent="0" marL="0">
+              <a:lnSpc>
+                <a:spcPts val="1620"/>
+              </a:lnSpc>
+              <a:spcAft>
+                <a:spcPts val="300"/>
+              </a:spcAft>
+              <a:buNone/>
+            </a:pPr>
+            <a:r>
+              <a:rPr lang="en-US" sz="1200" dirty="0">
+                <a:solidFill>
+                  <a:srgbClr val="1A1A1A"/>
+                </a:solidFill>
+                <a:latin typeface="Georgia" pitchFamily="34" charset="0"/>
+                <a:ea typeface="Georgia" pitchFamily="34" charset="-122"/>
+                <a:cs typeface="Georgia" pitchFamily="34" charset="-120"/>
+              </a:rPr>
+              <a:t> — </a:t>
+            </a:r>
+            <a:pPr algn="l" indent="0" marL="0">
+              <a:lnSpc>
+                <a:spcPts val="1620"/>
+              </a:lnSpc>
+              <a:spcAft>
+                <a:spcPts val="300"/>
+              </a:spcAft>
+              <a:buNone/>
+            </a:pPr>
+            <a:r>
+              <a:rPr lang="en-US" sz="1200" i="1" dirty="0">
+                <a:solidFill>
+                  <a:srgbClr val="1A1A1A"/>
+                </a:solidFill>
+                <a:latin typeface="Georgia" pitchFamily="34" charset="0"/>
+                <a:ea typeface="Georgia" pitchFamily="34" charset="-122"/>
+                <a:cs typeface="Georgia" pitchFamily="34" charset="-120"/>
+              </a:rPr>
+              <a:t>dhyāna</a:t>
+            </a:r>
+            <a:pPr algn="l" indent="0" marL="0">
+              <a:lnSpc>
+                <a:spcPts val="1620"/>
+              </a:lnSpc>
+              <a:spcAft>
+                <a:spcPts val="300"/>
+              </a:spcAft>
+              <a:buNone/>
+            </a:pPr>
+            <a:r>
+              <a:rPr lang="en-US" sz="1200" dirty="0">
+                <a:solidFill>
+                  <a:srgbClr val="1A1A1A"/>
+                </a:solidFill>
+                <a:latin typeface="Georgia" pitchFamily="34" charset="0"/>
+                <a:ea typeface="Georgia" pitchFamily="34" charset="-122"/>
+                <a:cs typeface="Georgia" pitchFamily="34" charset="-120"/>
+              </a:rPr>
+              <a:t> · sustained meditation · YS 3.2</a:t>
+            </a:r>
+            <a:endParaRPr lang="en-US" sz="1200" dirty="0"/>
+          </a:p>
+          <a:p>
+            <a:pPr algn="l" marL="342900" indent="-342900">
+              <a:lnSpc>
+                <a:spcPts val="1620"/>
+              </a:lnSpc>
+              <a:spcAft>
+                <a:spcPts val="300"/>
+              </a:spcAft>
+              <a:buSzPct val="100000"/>
+              <a:buChar char="•"/>
+            </a:pPr>
+            <a:r>
+              <a:rPr lang="en-US" sz="1200" b="1" dirty="0">
+                <a:solidFill>
+                  <a:srgbClr val="1A1A1A"/>
+                </a:solidFill>
+                <a:latin typeface="Georgia" pitchFamily="34" charset="0"/>
+                <a:ea typeface="Georgia" pitchFamily="34" charset="-122"/>
+                <a:cs typeface="Georgia" pitchFamily="34" charset="-120"/>
+              </a:rPr>
+              <a:t>8</a:t>
+            </a:r>
+            <a:pPr algn="l" indent="0" marL="0">
+              <a:lnSpc>
+                <a:spcPts val="1620"/>
+              </a:lnSpc>
+              <a:spcAft>
+                <a:spcPts val="300"/>
+              </a:spcAft>
+              <a:buNone/>
+            </a:pPr>
+            <a:r>
+              <a:rPr lang="en-US" sz="1200" dirty="0">
+                <a:solidFill>
+                  <a:srgbClr val="1A1A1A"/>
+                </a:solidFill>
+                <a:latin typeface="Georgia" pitchFamily="34" charset="0"/>
+                <a:ea typeface="Georgia" pitchFamily="34" charset="-122"/>
+                <a:cs typeface="Georgia" pitchFamily="34" charset="-120"/>
+              </a:rPr>
+              <a:t> — </a:t>
+            </a:r>
+            <a:pPr algn="l" indent="0" marL="0">
+              <a:lnSpc>
+                <a:spcPts val="1620"/>
+              </a:lnSpc>
+              <a:spcAft>
+                <a:spcPts val="300"/>
+              </a:spcAft>
+              <a:buNone/>
+            </a:pPr>
+            <a:r>
+              <a:rPr lang="en-US" sz="1200" i="1" dirty="0">
+                <a:solidFill>
+                  <a:srgbClr val="1A1A1A"/>
+                </a:solidFill>
+                <a:latin typeface="Georgia" pitchFamily="34" charset="0"/>
+                <a:ea typeface="Georgia" pitchFamily="34" charset="-122"/>
+                <a:cs typeface="Georgia" pitchFamily="34" charset="-120"/>
+              </a:rPr>
+              <a:t>samādhi</a:t>
+            </a:r>
+            <a:pPr algn="l" indent="0" marL="0">
+              <a:lnSpc>
+                <a:spcPts val="1620"/>
+              </a:lnSpc>
+              <a:spcAft>
+                <a:spcPts val="300"/>
+              </a:spcAft>
+              <a:buNone/>
+            </a:pPr>
+            <a:r>
+              <a:rPr lang="en-US" sz="1200" dirty="0">
+                <a:solidFill>
+                  <a:srgbClr val="1A1A1A"/>
+                </a:solidFill>
+                <a:latin typeface="Georgia" pitchFamily="34" charset="0"/>
+                <a:ea typeface="Georgia" pitchFamily="34" charset="-122"/>
+                <a:cs typeface="Georgia" pitchFamily="34" charset="-120"/>
+              </a:rPr>
+              <a:t> · absorption · YS 3.3</a:t>
             </a:r>
             <a:endParaRPr lang="en-US" sz="1200" dirty="0"/>
           </a:p>
@@ -5154,7 +6418,7 @@
                 <a:ea typeface="Times New Roman" pitchFamily="34" charset="-122"/>
                 <a:cs typeface="Times New Roman" pitchFamily="34" charset="-120"/>
               </a:rPr>
-              <a:t>Differentiation</a:t>
+              <a:t>Core (20 min) (cont.)</a:t>
             </a:r>
             <a:endParaRPr lang="en-US" sz="1800" dirty="0"/>
           </a:p>
@@ -5169,7 +6433,7 @@
         <p:spPr>
           <a:xfrm>
             <a:off x="634901" y="883593"/>
-            <a:ext cx="8102798" cy="525661"/>
+            <a:ext cx="8102798" cy="281880"/>
           </a:xfrm>
           <a:prstGeom prst="rect">
             <a:avLst/>
@@ -5200,7 +6464,7 @@
                 <a:ea typeface="Georgia" pitchFamily="34" charset="-122"/>
                 <a:cs typeface="Georgia" pitchFamily="34" charset="-120"/>
               </a:rPr>
-              <a:t>Tier up:</a:t>
+              <a:t>Note the proportions.</a:t>
             </a:r>
             <a:pPr algn="l" indent="0" marL="0">
               <a:lnSpc>
@@ -5220,7 +6484,7 @@
                 <a:ea typeface="Georgia" pitchFamily="34" charset="-122"/>
                 <a:cs typeface="Georgia" pitchFamily="34" charset="-120"/>
               </a:rPr>
-              <a:t> Memorise the 5 </a:t>
+              <a:t> Patañjali's </a:t>
             </a:r>
             <a:pPr algn="l" indent="0" marL="0">
               <a:lnSpc>
@@ -5240,7 +6504,7 @@
                 <a:ea typeface="Georgia" pitchFamily="34" charset="-122"/>
                 <a:cs typeface="Georgia" pitchFamily="34" charset="-120"/>
               </a:rPr>
-              <a:t>yamas</a:t>
+              <a:t>Yoga Sūtras</a:t>
             </a:r>
             <a:pPr algn="l" indent="0" marL="0">
               <a:lnSpc>
@@ -5260,50 +6524,32 @@
                 <a:ea typeface="Georgia" pitchFamily="34" charset="-122"/>
                 <a:cs typeface="Georgia" pitchFamily="34" charset="-120"/>
               </a:rPr>
-              <a:t> and 5 </a:t>
-            </a:r>
-            <a:pPr algn="l" indent="0" marL="0">
-              <a:lnSpc>
-                <a:spcPts val="1620"/>
-              </a:lnSpc>
-              <a:spcAft>
-                <a:spcPts val="300"/>
-              </a:spcAft>
-              <a:buNone/>
-            </a:pPr>
-            <a:r>
-              <a:rPr lang="en-US" sz="1200" i="1" dirty="0">
-                <a:solidFill>
-                  <a:srgbClr val="1A1A1A"/>
-                </a:solidFill>
-                <a:latin typeface="Georgia" pitchFamily="34" charset="0"/>
-                <a:ea typeface="Georgia" pitchFamily="34" charset="-122"/>
-                <a:cs typeface="Georgia" pitchFamily="34" charset="-120"/>
-              </a:rPr>
-              <a:t>niyamas</a:t>
-            </a:r>
-            <a:pPr algn="l" indent="0" marL="0">
-              <a:lnSpc>
-                <a:spcPts val="1620"/>
-              </a:lnSpc>
-              <a:spcAft>
-                <a:spcPts val="300"/>
-              </a:spcAft>
-              <a:buNone/>
-            </a:pPr>
-            <a:r>
-              <a:rPr lang="en-US" sz="1200" dirty="0">
-                <a:solidFill>
-                  <a:srgbClr val="1A1A1A"/>
-                </a:solidFill>
-                <a:latin typeface="Georgia" pitchFamily="34" charset="0"/>
-                <a:ea typeface="Georgia" pitchFamily="34" charset="-122"/>
-                <a:cs typeface="Georgia" pitchFamily="34" charset="-120"/>
-              </a:rPr>
-              <a:t> in Sanskrit.</a:t>
+              <a:t> total ~196 sūtras across 4 chapters. Of these:</a:t>
             </a:r>
             <a:endParaRPr lang="en-US" sz="1200" dirty="0"/>
           </a:p>
+        </p:txBody>
+      </p:sp>
+      <p:sp>
+        <p:nvSpPr>
+          <p:cNvPr id="5" name="Text 3"/>
+          <p:cNvSpPr/>
+          <p:nvPr/>
+        </p:nvSpPr>
+        <p:spPr>
+          <a:xfrm>
+            <a:off x="634901" y="1266974"/>
+            <a:ext cx="8102798" cy="1257002"/>
+          </a:xfrm>
+          <a:prstGeom prst="rect">
+            <a:avLst/>
+          </a:prstGeom>
+          <a:noFill/>
+          <a:ln/>
+        </p:spPr>
+        <p:txBody>
+          <a:bodyPr wrap="square" lIns="0" tIns="0" rIns="0" bIns="0" rtlCol="0" anchor="t"/>
+          <a:lstStyle/>
           <a:p>
             <a:pPr algn="l" marL="342900" indent="-342900">
               <a:lnSpc>
@@ -5316,24 +6562,28 @@
               <a:buChar char="•"/>
             </a:pPr>
             <a:r>
-              <a:rPr lang="en-US" sz="1200" b="1" dirty="0">
-                <a:solidFill>
-                  <a:srgbClr val="1A1A1A"/>
-                </a:solidFill>
-                <a:latin typeface="Georgia" pitchFamily="34" charset="0"/>
-                <a:ea typeface="Georgia" pitchFamily="34" charset="-122"/>
-                <a:cs typeface="Georgia" pitchFamily="34" charset="-120"/>
-              </a:rPr>
-              <a:t>Tier down:</a:t>
-            </a:r>
-            <a:pPr algn="l" indent="0" marL="0">
+              <a:rPr lang="en-US" sz="1200" dirty="0">
+                <a:solidFill>
+                  <a:srgbClr val="1A1A1A"/>
+                </a:solidFill>
+                <a:latin typeface="Georgia" pitchFamily="34" charset="0"/>
+                <a:ea typeface="Georgia" pitchFamily="34" charset="-122"/>
+                <a:cs typeface="Georgia" pitchFamily="34" charset="-120"/>
+              </a:rPr>
+              <a:t>Ethics + observances (yama, niyama): ~16 sūtras</a:t>
+            </a:r>
+            <a:endParaRPr lang="en-US" sz="1200" dirty="0"/>
+          </a:p>
+          <a:p>
+            <a:pPr algn="l" marL="342900" indent="-342900">
               <a:lnSpc>
                 <a:spcPts val="1620"/>
               </a:lnSpc>
               <a:spcAft>
                 <a:spcPts val="300"/>
               </a:spcAft>
-              <a:buNone/>
+              <a:buSzPct val="100000"/>
+              <a:buChar char="•"/>
             </a:pPr>
             <a:r>
               <a:rPr lang="en-US" sz="1200" dirty="0">
@@ -5344,15 +6594,87 @@
                 <a:ea typeface="Georgia" pitchFamily="34" charset="-122"/>
                 <a:cs typeface="Georgia" pitchFamily="34" charset="-120"/>
               </a:rPr>
-              <a:t> Memorise the 8 limbs only.</a:t>
+              <a:t>Āsana: ~3 sūtras (just YS 2.46–48)</a:t>
             </a:r>
             <a:endParaRPr lang="en-US" sz="1200" dirty="0"/>
           </a:p>
-        </p:txBody>
-      </p:sp>
-      <p:sp>
-        <p:nvSpPr>
-          <p:cNvPr id="5" name="Text 3"/>
+          <a:p>
+            <a:pPr algn="l" marL="342900" indent="-342900">
+              <a:lnSpc>
+                <a:spcPts val="1620"/>
+              </a:lnSpc>
+              <a:spcAft>
+                <a:spcPts val="300"/>
+              </a:spcAft>
+              <a:buSzPct val="100000"/>
+              <a:buChar char="•"/>
+            </a:pPr>
+            <a:r>
+              <a:rPr lang="en-US" sz="1200" dirty="0">
+                <a:solidFill>
+                  <a:srgbClr val="1A1A1A"/>
+                </a:solidFill>
+                <a:latin typeface="Georgia" pitchFamily="34" charset="0"/>
+                <a:ea typeface="Georgia" pitchFamily="34" charset="-122"/>
+                <a:cs typeface="Georgia" pitchFamily="34" charset="-120"/>
+              </a:rPr>
+              <a:t>Prāṇāyāma: ~5 sūtras (YS 2.49–53)</a:t>
+            </a:r>
+            <a:endParaRPr lang="en-US" sz="1200" dirty="0"/>
+          </a:p>
+          <a:p>
+            <a:pPr algn="l" marL="342900" indent="-342900">
+              <a:lnSpc>
+                <a:spcPts val="1620"/>
+              </a:lnSpc>
+              <a:spcAft>
+                <a:spcPts val="300"/>
+              </a:spcAft>
+              <a:buSzPct val="100000"/>
+              <a:buChar char="•"/>
+            </a:pPr>
+            <a:r>
+              <a:rPr lang="en-US" sz="1200" dirty="0">
+                <a:solidFill>
+                  <a:srgbClr val="1A1A1A"/>
+                </a:solidFill>
+                <a:latin typeface="Georgia" pitchFamily="34" charset="0"/>
+                <a:ea typeface="Georgia" pitchFamily="34" charset="-122"/>
+                <a:cs typeface="Georgia" pitchFamily="34" charset="-120"/>
+              </a:rPr>
+              <a:t>Pratyāhāra: ~2 sūtras</a:t>
+            </a:r>
+            <a:endParaRPr lang="en-US" sz="1200" dirty="0"/>
+          </a:p>
+          <a:p>
+            <a:pPr algn="l" marL="342900" indent="-342900">
+              <a:lnSpc>
+                <a:spcPts val="1620"/>
+              </a:lnSpc>
+              <a:spcAft>
+                <a:spcPts val="300"/>
+              </a:spcAft>
+              <a:buSzPct val="100000"/>
+              <a:buChar char="•"/>
+            </a:pPr>
+            <a:r>
+              <a:rPr lang="en-US" sz="1200" dirty="0">
+                <a:solidFill>
+                  <a:srgbClr val="1A1A1A"/>
+                </a:solidFill>
+                <a:latin typeface="Georgia" pitchFamily="34" charset="0"/>
+                <a:ea typeface="Georgia" pitchFamily="34" charset="-122"/>
+                <a:cs typeface="Georgia" pitchFamily="34" charset="-120"/>
+              </a:rPr>
+              <a:t>Dhāraṇā + dhyāna + samādhi: most of Chapter 3 (~50 sūtras)</a:t>
+            </a:r>
+            <a:endParaRPr lang="en-US" sz="1200" dirty="0"/>
+          </a:p>
+        </p:txBody>
+      </p:sp>
+      <p:sp>
+        <p:nvSpPr>
+          <p:cNvPr id="6" name="Text 4"/>
           <p:cNvSpPr/>
           <p:nvPr/>
         </p:nvSpPr>
